--- a/research/paper-arxiv/images/demo_walkthrough.pptx
+++ b/research/paper-arxiv/images/demo_walkthrough.pptx
@@ -7,7 +7,7 @@
   <p:sldIdLst>
     <p:sldId id="256" r:id="rId7"/>
   </p:sldIdLst>
-  <p:sldSz cx="12700000" cy="5029200" type="screen4x3"/>
+  <p:sldSz cx="12700000" cy="5461000" type="screen4x3"/>
   <p:notesSz cx="6858000" cy="9144000"/>
   <p:defaultTextStyle>
     <a:defPPr>
@@ -3097,7 +3097,7 @@
         <p:spPr>
           <a:xfrm>
             <a:off x="152400" y="177800"/>
-            <a:ext cx="4064000" cy="4673600"/>
+            <a:ext cx="4064000" cy="5130800"/>
           </a:xfrm>
           <a:prstGeom prst="roundRect">
             <a:avLst>
@@ -3142,8 +3142,8 @@
         </p:nvSpPr>
         <p:spPr>
           <a:xfrm>
-            <a:off x="304800" y="271145"/>
-            <a:ext cx="1299210" cy="301752"/>
+            <a:off x="330200" y="288925"/>
+            <a:ext cx="1771650" cy="411480"/>
           </a:xfrm>
           <a:prstGeom prst="rect">
             <a:avLst/>
@@ -3158,7 +3158,7 @@
           <a:p>
             <a:pPr algn="l"/>
             <a:r>
-              <a:rPr sz="1100" b="1" i="0">
+              <a:rPr sz="1500" b="1" i="0">
                 <a:solidFill>
                   <a:srgbClr val="15795A"/>
                 </a:solidFill>
@@ -3185,8 +3185,8 @@
         </p:blipFill>
         <p:spPr>
           <a:xfrm>
-            <a:off x="3860800" y="279400"/>
-            <a:ext cx="177800" cy="177800"/>
+            <a:off x="3835400" y="330200"/>
+            <a:ext cx="190500" cy="190500"/>
           </a:xfrm>
           <a:prstGeom prst="rect">
             <a:avLst/>
@@ -3201,12 +3201,12 @@
         </p:nvSpPr>
         <p:spPr>
           <a:xfrm>
-            <a:off x="279400" y="533400"/>
-            <a:ext cx="3810000" cy="330200"/>
+            <a:off x="304800" y="635000"/>
+            <a:ext cx="3759200" cy="431800"/>
           </a:xfrm>
           <a:prstGeom prst="roundRect">
             <a:avLst>
-              <a:gd name="adj" fmla="val 19230"/>
+              <a:gd name="adj" fmla="val 14705"/>
             </a:avLst>
           </a:prstGeom>
           <a:solidFill>
@@ -3247,8 +3247,8 @@
         </p:nvSpPr>
         <p:spPr>
           <a:xfrm>
-            <a:off x="381000" y="638302"/>
-            <a:ext cx="2692908" cy="208483"/>
+            <a:off x="406400" y="746442"/>
+            <a:ext cx="4074795" cy="315468"/>
           </a:xfrm>
           <a:prstGeom prst="rect">
             <a:avLst/>
@@ -3263,7 +3263,7 @@
           <a:p>
             <a:pPr algn="l"/>
             <a:r>
-              <a:rPr sz="760" b="0" i="1">
+              <a:rPr sz="1150" b="0" i="1">
                 <a:solidFill>
                   <a:srgbClr val="1F2937"/>
                 </a:solidFill>
@@ -3283,7 +3283,7 @@
         <p:spPr>
           <a:xfrm>
             <a:off x="4368800" y="177800"/>
-            <a:ext cx="4064000" cy="4673600"/>
+            <a:ext cx="4064000" cy="5130800"/>
           </a:xfrm>
           <a:prstGeom prst="roundRect">
             <a:avLst>
@@ -3328,8 +3328,8 @@
         </p:nvSpPr>
         <p:spPr>
           <a:xfrm>
-            <a:off x="4521200" y="271145"/>
-            <a:ext cx="1385824" cy="301752"/>
+            <a:off x="4546600" y="288925"/>
+            <a:ext cx="1889760" cy="411480"/>
           </a:xfrm>
           <a:prstGeom prst="rect">
             <a:avLst/>
@@ -3344,7 +3344,7 @@
           <a:p>
             <a:pPr algn="l"/>
             <a:r>
-              <a:rPr sz="1100" b="1" i="0">
+              <a:rPr sz="1500" b="1" i="0">
                 <a:solidFill>
                   <a:srgbClr val="A85F12"/>
                 </a:solidFill>
@@ -3371,8 +3371,8 @@
         </p:blipFill>
         <p:spPr>
           <a:xfrm>
-            <a:off x="8077200" y="279400"/>
-            <a:ext cx="177800" cy="177800"/>
+            <a:off x="8051800" y="330200"/>
+            <a:ext cx="190500" cy="190500"/>
           </a:xfrm>
           <a:prstGeom prst="rect">
             <a:avLst/>
@@ -3387,12 +3387,12 @@
         </p:nvSpPr>
         <p:spPr>
           <a:xfrm>
-            <a:off x="4495800" y="533400"/>
-            <a:ext cx="3810000" cy="330200"/>
+            <a:off x="4521200" y="635000"/>
+            <a:ext cx="3759200" cy="431800"/>
           </a:xfrm>
           <a:prstGeom prst="roundRect">
             <a:avLst>
-              <a:gd name="adj" fmla="val 19230"/>
+              <a:gd name="adj" fmla="val 14705"/>
             </a:avLst>
           </a:prstGeom>
           <a:solidFill>
@@ -3433,8 +3433,8 @@
         </p:nvSpPr>
         <p:spPr>
           <a:xfrm>
-            <a:off x="4597400" y="638302"/>
-            <a:ext cx="2812593" cy="208483"/>
+            <a:off x="4622800" y="746442"/>
+            <a:ext cx="4255897" cy="315468"/>
           </a:xfrm>
           <a:prstGeom prst="rect">
             <a:avLst/>
@@ -3449,7 +3449,7 @@
           <a:p>
             <a:pPr algn="l"/>
             <a:r>
-              <a:rPr sz="760" b="0" i="1">
+              <a:rPr sz="1150" b="0" i="1">
                 <a:solidFill>
                   <a:srgbClr val="1F2937"/>
                 </a:solidFill>
@@ -3469,7 +3469,7 @@
         <p:spPr>
           <a:xfrm>
             <a:off x="8585200" y="177800"/>
-            <a:ext cx="4064000" cy="4673600"/>
+            <a:ext cx="4064000" cy="5130800"/>
           </a:xfrm>
           <a:prstGeom prst="roundRect">
             <a:avLst>
@@ -3514,8 +3514,8 @@
         </p:nvSpPr>
         <p:spPr>
           <a:xfrm>
-            <a:off x="8737600" y="271145"/>
-            <a:ext cx="1559052" cy="301752"/>
+            <a:off x="8763000" y="288925"/>
+            <a:ext cx="2125980" cy="411480"/>
           </a:xfrm>
           <a:prstGeom prst="rect">
             <a:avLst/>
@@ -3530,7 +3530,7 @@
           <a:p>
             <a:pPr algn="l"/>
             <a:r>
-              <a:rPr sz="1100" b="1" i="0">
+              <a:rPr sz="1500" b="1" i="0">
                 <a:solidFill>
                   <a:srgbClr val="6D3FBF"/>
                 </a:solidFill>
@@ -3557,8 +3557,8 @@
         </p:blipFill>
         <p:spPr>
           <a:xfrm>
-            <a:off x="12293600" y="279400"/>
-            <a:ext cx="177800" cy="177800"/>
+            <a:off x="12268200" y="330200"/>
+            <a:ext cx="190500" cy="190500"/>
           </a:xfrm>
           <a:prstGeom prst="rect">
             <a:avLst/>
@@ -3573,12 +3573,12 @@
         </p:nvSpPr>
         <p:spPr>
           <a:xfrm>
-            <a:off x="8712200" y="533400"/>
-            <a:ext cx="3810000" cy="330200"/>
+            <a:off x="8737600" y="635000"/>
+            <a:ext cx="3759200" cy="431800"/>
           </a:xfrm>
           <a:prstGeom prst="roundRect">
             <a:avLst>
-              <a:gd name="adj" fmla="val 19230"/>
+              <a:gd name="adj" fmla="val 14705"/>
             </a:avLst>
           </a:prstGeom>
           <a:solidFill>
@@ -3619,8 +3619,8 @@
         </p:nvSpPr>
         <p:spPr>
           <a:xfrm>
-            <a:off x="8813800" y="638302"/>
-            <a:ext cx="2154326" cy="208483"/>
+            <a:off x="8839200" y="746442"/>
+            <a:ext cx="3259836" cy="315468"/>
           </a:xfrm>
           <a:prstGeom prst="rect">
             <a:avLst/>
@@ -3635,7 +3635,7 @@
           <a:p>
             <a:pPr algn="l"/>
             <a:r>
-              <a:rPr sz="760" b="0" i="1">
+              <a:rPr sz="1150" b="0" i="1">
                 <a:solidFill>
                   <a:srgbClr val="1F2937"/>
                 </a:solidFill>
@@ -3654,12 +3654,12 @@
         </p:nvSpPr>
         <p:spPr>
           <a:xfrm>
-            <a:off x="279400" y="965200"/>
-            <a:ext cx="3810000" cy="279400"/>
+            <a:off x="304800" y="1193800"/>
+            <a:ext cx="3759200" cy="355600"/>
           </a:xfrm>
           <a:prstGeom prst="roundRect">
             <a:avLst>
-              <a:gd name="adj" fmla="val 22727"/>
+              <a:gd name="adj" fmla="val 17857"/>
             </a:avLst>
           </a:prstGeom>
           <a:solidFill>
@@ -3700,8 +3700,8 @@
         </p:nvSpPr>
         <p:spPr>
           <a:xfrm>
-            <a:off x="381000" y="1032662"/>
-            <a:ext cx="1700784" cy="197510"/>
+            <a:off x="406400" y="1256220"/>
+            <a:ext cx="2716530" cy="315468"/>
           </a:xfrm>
           <a:prstGeom prst="rect">
             <a:avLst/>
@@ -3716,7 +3716,7 @@
           <a:p>
             <a:pPr algn="l"/>
             <a:r>
-              <a:rPr sz="720" b="0" i="0">
+              <a:rPr sz="1150" b="0" i="0">
                 <a:solidFill>
                   <a:srgbClr val="334155"/>
                 </a:solidFill>
@@ -3727,20 +3727,79 @@
           </a:p>
         </p:txBody>
       </p:sp>
-      <p:sp>
-        <p:nvSpPr>
-          <p:cNvPr id="19" name="Rounded Rectangle 18"/>
+      <p:pic>
+        <p:nvPicPr>
+          <p:cNvPr id="19" name="Picture 18" descr="circle-check--16a34a.256.png"/>
+          <p:cNvPicPr>
+            <a:picLocks noChangeAspect="1"/>
+          </p:cNvPicPr>
+          <p:nvPr/>
+        </p:nvPicPr>
+        <p:blipFill>
+          <a:blip r:embed="rId5"/>
+          <a:stretch>
+            <a:fillRect/>
+          </a:stretch>
+        </p:blipFill>
+        <p:spPr>
+          <a:xfrm>
+            <a:off x="330200" y="1803400"/>
+            <a:ext cx="165100" cy="165100"/>
+          </a:xfrm>
+          <a:prstGeom prst="rect">
+            <a:avLst/>
+          </a:prstGeom>
+        </p:spPr>
+      </p:pic>
+      <p:sp>
+        <p:nvSpPr>
+          <p:cNvPr id="20" name="TextBox 19"/>
+          <p:cNvSpPr txBox="1"/>
+          <p:nvPr/>
+        </p:nvSpPr>
+        <p:spPr>
+          <a:xfrm>
+            <a:off x="546100" y="1771586"/>
+            <a:ext cx="762000" cy="260604"/>
+          </a:xfrm>
+          <a:prstGeom prst="rect">
+            <a:avLst/>
+          </a:prstGeom>
+          <a:noFill/>
+        </p:spPr>
+        <p:txBody>
+          <a:bodyPr wrap="none" lIns="0" rIns="0" tIns="0" bIns="0" anchor="t">
+            <a:spAutoFit/>
+          </a:bodyPr>
+          <a:lstStyle/>
+          <a:p>
+            <a:pPr algn="l"/>
+            <a:r>
+              <a:rPr sz="950" b="0" i="0">
+                <a:solidFill>
+                  <a:srgbClr val="16A34A"/>
+                </a:solidFill>
+                <a:latin typeface="Helvetica Neue"/>
+              </a:rPr>
+              <a:t>allow</a:t>
+            </a:r>
+          </a:p>
+        </p:txBody>
+      </p:sp>
+      <p:sp>
+        <p:nvSpPr>
+          <p:cNvPr id="21" name="Rounded Rectangle 20"/>
           <p:cNvSpPr/>
           <p:nvPr/>
         </p:nvSpPr>
         <p:spPr>
           <a:xfrm>
-            <a:off x="279400" y="1320800"/>
-            <a:ext cx="3810000" cy="1473200"/>
+            <a:off x="304800" y="2108200"/>
+            <a:ext cx="3759200" cy="1168400"/>
           </a:xfrm>
           <a:prstGeom prst="roundRect">
             <a:avLst>
-              <a:gd name="adj" fmla="val 5172"/>
+              <a:gd name="adj" fmla="val 7608"/>
             </a:avLst>
           </a:prstGeom>
           <a:solidFill>
@@ -3773,40 +3832,16 @@
           <a:p/>
         </p:txBody>
       </p:sp>
-      <p:pic>
-        <p:nvPicPr>
-          <p:cNvPr id="20" name="Picture 19" descr="session.0.11-0.09-1.00-0.67.png"/>
-          <p:cNvPicPr>
-            <a:picLocks noChangeAspect="1"/>
-          </p:cNvPicPr>
-          <p:nvPr/>
-        </p:nvPicPr>
-        <p:blipFill>
-          <a:blip r:embed="rId5"/>
-          <a:stretch>
-            <a:fillRect/>
-          </a:stretch>
-        </p:blipFill>
-        <p:spPr>
-          <a:xfrm>
-            <a:off x="317500" y="1358900"/>
-            <a:ext cx="3733800" cy="1397000"/>
-          </a:xfrm>
-          <a:prstGeom prst="rect">
-            <a:avLst/>
-          </a:prstGeom>
-        </p:spPr>
-      </p:pic>
-      <p:sp>
-        <p:nvSpPr>
-          <p:cNvPr id="21" name="TextBox 20"/>
+      <p:sp>
+        <p:nvSpPr>
+          <p:cNvPr id="22" name="TextBox 21"/>
           <p:cNvSpPr txBox="1"/>
           <p:nvPr/>
         </p:nvSpPr>
         <p:spPr>
           <a:xfrm>
-            <a:off x="279400" y="2863723"/>
-            <a:ext cx="1689760" cy="202997"/>
+            <a:off x="1672590" y="2236470"/>
+            <a:ext cx="1023620" cy="713232"/>
           </a:xfrm>
           <a:prstGeom prst="rect">
             <a:avLst/>
@@ -3819,53 +3854,64 @@
           </a:bodyPr>
           <a:lstStyle/>
           <a:p>
-            <a:pPr algn="l"/>
-            <a:r>
-              <a:rPr sz="740" b="0" i="1">
+            <a:pPr algn="ctr"/>
+            <a:r>
+              <a:rPr sz="2600" b="1" i="0">
+                <a:solidFill>
+                  <a:srgbClr val="16A34A"/>
+                </a:solidFill>
+                <a:latin typeface="Helvetica Neue"/>
+              </a:rPr>
+              <a:t>~1 ms</a:t>
+            </a:r>
+          </a:p>
+        </p:txBody>
+      </p:sp>
+      <p:sp>
+        <p:nvSpPr>
+          <p:cNvPr id="23" name="TextBox 22"/>
+          <p:cNvSpPr txBox="1"/>
+          <p:nvPr/>
+        </p:nvSpPr>
+        <p:spPr>
+          <a:xfrm>
+            <a:off x="1428496" y="2694940"/>
+            <a:ext cx="1511808" cy="329184"/>
+          </a:xfrm>
+          <a:prstGeom prst="rect">
+            <a:avLst/>
+          </a:prstGeom>
+          <a:noFill/>
+        </p:spPr>
+        <p:txBody>
+          <a:bodyPr wrap="none" lIns="0" rIns="0" tIns="0" bIns="0" anchor="t">
+            <a:spAutoFit/>
+          </a:bodyPr>
+          <a:lstStyle/>
+          <a:p>
+            <a:pPr algn="ctr"/>
+            <a:r>
+              <a:rPr sz="1200" b="0" i="0">
                 <a:solidFill>
                   <a:srgbClr val="64748B"/>
                 </a:solidFill>
                 <a:latin typeface="Helvetica Neue"/>
               </a:rPr>
-              <a:t>live feed, risk signals, cost</a:t>
-            </a:r>
-          </a:p>
-        </p:txBody>
-      </p:sp>
-      <p:pic>
-        <p:nvPicPr>
-          <p:cNvPr id="22" name="Picture 21" descr="circle-check--16a34a.256.png"/>
-          <p:cNvPicPr>
-            <a:picLocks noChangeAspect="1"/>
-          </p:cNvPicPr>
-          <p:nvPr/>
-        </p:nvPicPr>
-        <p:blipFill>
-          <a:blip r:embed="rId6"/>
-          <a:stretch>
-            <a:fillRect/>
-          </a:stretch>
-        </p:blipFill>
-        <p:spPr>
-          <a:xfrm>
-            <a:off x="304800" y="3200400"/>
-            <a:ext cx="165100" cy="165100"/>
-          </a:xfrm>
-          <a:prstGeom prst="rect">
-            <a:avLst/>
-          </a:prstGeom>
-        </p:spPr>
-      </p:pic>
-      <p:sp>
-        <p:nvSpPr>
-          <p:cNvPr id="23" name="TextBox 22"/>
+              <a:t>decision latency</a:t>
+            </a:r>
+          </a:p>
+        </p:txBody>
+      </p:sp>
+      <p:sp>
+        <p:nvSpPr>
+          <p:cNvPr id="24" name="TextBox 23"/>
           <p:cNvSpPr txBox="1"/>
           <p:nvPr/>
         </p:nvSpPr>
         <p:spPr>
           <a:xfrm>
-            <a:off x="520700" y="3168586"/>
-            <a:ext cx="762000" cy="260604"/>
+            <a:off x="463931" y="2956242"/>
+            <a:ext cx="3440938" cy="315468"/>
           </a:xfrm>
           <a:prstGeom prst="rect">
             <a:avLst/>
@@ -3878,37 +3924,212 @@
           </a:bodyPr>
           <a:lstStyle/>
           <a:p>
-            <a:pPr algn="l"/>
-            <a:r>
-              <a:rPr sz="950" b="0" i="0">
+            <a:pPr algn="ctr"/>
+            <a:r>
+              <a:rPr sz="1150" b="0" i="0">
                 <a:solidFill>
-                  <a:srgbClr val="16A34A"/>
+                  <a:srgbClr val="64748B"/>
                 </a:solidFill>
                 <a:latin typeface="Helvetica Neue"/>
               </a:rPr>
-              <a:t>allow</a:t>
-            </a:r>
-          </a:p>
-        </p:txBody>
-      </p:sp>
-      <p:sp>
-        <p:nvSpPr>
-          <p:cNvPr id="24" name="Rounded Rectangle 23"/>
+              <a:t>the turn completes at its normal speed</a:t>
+            </a:r>
+          </a:p>
+        </p:txBody>
+      </p:sp>
+      <p:sp>
+        <p:nvSpPr>
+          <p:cNvPr id="25" name="TextBox 24"/>
+          <p:cNvSpPr txBox="1"/>
+          <p:nvPr/>
+        </p:nvSpPr>
+        <p:spPr>
+          <a:xfrm>
+            <a:off x="330200" y="3525838"/>
+            <a:ext cx="2263775" cy="342900"/>
+          </a:xfrm>
+          <a:prstGeom prst="rect">
+            <a:avLst/>
+          </a:prstGeom>
+          <a:noFill/>
+        </p:spPr>
+        <p:txBody>
+          <a:bodyPr wrap="none" lIns="0" rIns="0" tIns="0" bIns="0" anchor="t">
+            <a:spAutoFit/>
+          </a:bodyPr>
+          <a:lstStyle/>
+          <a:p>
+            <a:pPr algn="l"/>
+            <a:r>
+              <a:rPr sz="1250" b="1" i="0">
+                <a:solidFill>
+                  <a:srgbClr val="15795A"/>
+                </a:solidFill>
+                <a:latin typeface="Helvetica Neue"/>
+              </a:rPr>
+              <a:t>Shown first on purpose.</a:t>
+            </a:r>
+          </a:p>
+        </p:txBody>
+      </p:sp>
+      <p:sp>
+        <p:nvSpPr>
+          <p:cNvPr id="26" name="TextBox 25"/>
+          <p:cNvSpPr txBox="1"/>
+          <p:nvPr/>
+        </p:nvSpPr>
+        <p:spPr>
+          <a:xfrm>
+            <a:off x="330200" y="3787140"/>
+            <a:ext cx="3212592" cy="329184"/>
+          </a:xfrm>
+          <a:prstGeom prst="rect">
+            <a:avLst/>
+          </a:prstGeom>
+          <a:noFill/>
+        </p:spPr>
+        <p:txBody>
+          <a:bodyPr wrap="none" lIns="0" rIns="0" tIns="0" bIns="0" anchor="t">
+            <a:spAutoFit/>
+          </a:bodyPr>
+          <a:lstStyle/>
+          <a:p>
+            <a:pPr algn="l"/>
+            <a:r>
+              <a:rPr sz="1200" b="0" i="0">
+                <a:solidFill>
+                  <a:srgbClr val="15795A"/>
+                </a:solidFill>
+                <a:latin typeface="Helvetica Neue"/>
+              </a:rPr>
+              <a:t>A firewall only ever seen blocking</a:t>
+            </a:r>
+          </a:p>
+        </p:txBody>
+      </p:sp>
+      <p:sp>
+        <p:nvSpPr>
+          <p:cNvPr id="27" name="TextBox 26"/>
+          <p:cNvSpPr txBox="1"/>
+          <p:nvPr/>
+        </p:nvSpPr>
+        <p:spPr>
+          <a:xfrm>
+            <a:off x="330200" y="4003040"/>
+            <a:ext cx="3496056" cy="329184"/>
+          </a:xfrm>
+          <a:prstGeom prst="rect">
+            <a:avLst/>
+          </a:prstGeom>
+          <a:noFill/>
+        </p:spPr>
+        <p:txBody>
+          <a:bodyPr wrap="none" lIns="0" rIns="0" tIns="0" bIns="0" anchor="t">
+            <a:spAutoFit/>
+          </a:bodyPr>
+          <a:lstStyle/>
+          <a:p>
+            <a:pPr algn="l"/>
+            <a:r>
+              <a:rPr sz="1200" b="0" i="0">
+                <a:solidFill>
+                  <a:srgbClr val="15795A"/>
+                </a:solidFill>
+                <a:latin typeface="Helvetica Neue"/>
+              </a:rPr>
+              <a:t>says nothing about what it costs when</a:t>
+            </a:r>
+          </a:p>
+        </p:txBody>
+      </p:sp>
+      <p:sp>
+        <p:nvSpPr>
+          <p:cNvPr id="28" name="TextBox 27"/>
+          <p:cNvSpPr txBox="1"/>
+          <p:nvPr/>
+        </p:nvSpPr>
+        <p:spPr>
+          <a:xfrm>
+            <a:off x="330200" y="4218940"/>
+            <a:ext cx="3779520" cy="329184"/>
+          </a:xfrm>
+          <a:prstGeom prst="rect">
+            <a:avLst/>
+          </a:prstGeom>
+          <a:noFill/>
+        </p:spPr>
+        <p:txBody>
+          <a:bodyPr wrap="none" lIns="0" rIns="0" tIns="0" bIns="0" anchor="t">
+            <a:spAutoFit/>
+          </a:bodyPr>
+          <a:lstStyle/>
+          <a:p>
+            <a:pPr algn="l"/>
+            <a:r>
+              <a:rPr sz="1200" b="0" i="0">
+                <a:solidFill>
+                  <a:srgbClr val="15795A"/>
+                </a:solidFill>
+                <a:latin typeface="Helvetica Neue"/>
+              </a:rPr>
+              <a:t>nothing is wrong — which is the standard</a:t>
+            </a:r>
+          </a:p>
+        </p:txBody>
+      </p:sp>
+      <p:sp>
+        <p:nvSpPr>
+          <p:cNvPr id="29" name="TextBox 28"/>
+          <p:cNvSpPr txBox="1"/>
+          <p:nvPr/>
+        </p:nvSpPr>
+        <p:spPr>
+          <a:xfrm>
+            <a:off x="330200" y="4434840"/>
+            <a:ext cx="3496056" cy="329184"/>
+          </a:xfrm>
+          <a:prstGeom prst="rect">
+            <a:avLst/>
+          </a:prstGeom>
+          <a:noFill/>
+        </p:spPr>
+        <p:txBody>
+          <a:bodyPr wrap="none" lIns="0" rIns="0" tIns="0" bIns="0" anchor="t">
+            <a:spAutoFit/>
+          </a:bodyPr>
+          <a:lstStyle/>
+          <a:p>
+            <a:pPr algn="l"/>
+            <a:r>
+              <a:rPr sz="1200" b="0" i="0">
+                <a:solidFill>
+                  <a:srgbClr val="15795A"/>
+                </a:solidFill>
+                <a:latin typeface="Helvetica Neue"/>
+              </a:rPr>
+              <a:t>objection to sitting in the hot path.</a:t>
+            </a:r>
+          </a:p>
+        </p:txBody>
+      </p:sp>
+      <p:sp>
+        <p:nvSpPr>
+          <p:cNvPr id="30" name="Rounded Rectangle 29"/>
           <p:cNvSpPr/>
           <p:nvPr/>
         </p:nvSpPr>
         <p:spPr>
           <a:xfrm>
-            <a:off x="279400" y="3454400"/>
-            <a:ext cx="3810000" cy="558800"/>
+            <a:off x="4521200" y="1193800"/>
+            <a:ext cx="3759200" cy="355600"/>
           </a:xfrm>
           <a:prstGeom prst="roundRect">
             <a:avLst>
-              <a:gd name="adj" fmla="val 13636"/>
+              <a:gd name="adj" fmla="val 17857"/>
             </a:avLst>
           </a:prstGeom>
           <a:solidFill>
-            <a:srgbClr val="FFFFFF"/>
+            <a:srgbClr val="F8FAFC"/>
           </a:solidFill>
           <a:ln w="12700">
             <a:solidFill>
@@ -3937,40 +4158,16 @@
           <a:p/>
         </p:txBody>
       </p:sp>
-      <p:pic>
-        <p:nvPicPr>
-          <p:cNvPr id="25" name="Picture 24" descr="clock--64748b.256.png"/>
-          <p:cNvPicPr>
-            <a:picLocks noChangeAspect="1"/>
-          </p:cNvPicPr>
-          <p:nvPr/>
-        </p:nvPicPr>
-        <p:blipFill>
-          <a:blip r:embed="rId7"/>
-          <a:stretch>
-            <a:fillRect/>
-          </a:stretch>
-        </p:blipFill>
-        <p:spPr>
-          <a:xfrm>
-            <a:off x="381000" y="3556000"/>
-            <a:ext cx="165100" cy="165100"/>
-          </a:xfrm>
-          <a:prstGeom prst="rect">
-            <a:avLst/>
-          </a:prstGeom>
-        </p:spPr>
-      </p:pic>
-      <p:sp>
-        <p:nvSpPr>
-          <p:cNvPr id="26" name="TextBox 25"/>
+      <p:sp>
+        <p:nvSpPr>
+          <p:cNvPr id="31" name="TextBox 30"/>
           <p:cNvSpPr txBox="1"/>
           <p:nvPr/>
         </p:nvSpPr>
         <p:spPr>
           <a:xfrm>
-            <a:off x="635000" y="3573018"/>
-            <a:ext cx="1455115" cy="230429"/>
+            <a:off x="4622800" y="1261237"/>
+            <a:ext cx="2858262" cy="301752"/>
           </a:xfrm>
           <a:prstGeom prst="rect">
             <a:avLst/>
@@ -3985,179 +4182,39 @@
           <a:p>
             <a:pPr algn="l"/>
             <a:r>
-              <a:rPr sz="840" b="0" i="0">
+              <a:rPr sz="1100" b="0" i="0">
                 <a:solidFill>
-                  <a:srgbClr val="1F2937"/>
+                  <a:srgbClr val="334155"/>
                 </a:solidFill>
-                <a:latin typeface="Helvetica Neue"/>
+                <a:latin typeface="Menlo"/>
               </a:rPr>
-              <a:t>~1 ms decision latency</a:t>
-            </a:r>
-          </a:p>
-        </p:txBody>
-      </p:sp>
-      <p:sp>
-        <p:nvSpPr>
-          <p:cNvPr id="27" name="TextBox 26"/>
-          <p:cNvSpPr txBox="1"/>
-          <p:nvPr/>
-        </p:nvSpPr>
-        <p:spPr>
-          <a:xfrm>
-            <a:off x="381000" y="3803523"/>
-            <a:ext cx="2214169" cy="202997"/>
-          </a:xfrm>
-          <a:prstGeom prst="rect">
-            <a:avLst/>
-          </a:prstGeom>
-          <a:noFill/>
-        </p:spPr>
-        <p:txBody>
-          <a:bodyPr wrap="none" lIns="0" rIns="0" tIns="0" bIns="0" anchor="t">
-            <a:spAutoFit/>
-          </a:bodyPr>
-          <a:lstStyle/>
-          <a:p>
-            <a:pPr algn="l"/>
-            <a:r>
-              <a:rPr sz="740" b="0" i="0">
-                <a:solidFill>
-                  <a:srgbClr val="64748B"/>
-                </a:solidFill>
-                <a:latin typeface="Helvetica Neue"/>
-              </a:rPr>
-              <a:t>the turn completes at its normal speed</a:t>
-            </a:r>
-          </a:p>
-        </p:txBody>
-      </p:sp>
-      <p:sp>
-        <p:nvSpPr>
-          <p:cNvPr id="28" name="TextBox 27"/>
-          <p:cNvSpPr txBox="1"/>
-          <p:nvPr/>
-        </p:nvSpPr>
-        <p:spPr>
-          <a:xfrm>
-            <a:off x="279400" y="4156202"/>
-            <a:ext cx="2633066" cy="208483"/>
-          </a:xfrm>
-          <a:prstGeom prst="rect">
-            <a:avLst/>
-          </a:prstGeom>
-          <a:noFill/>
-        </p:spPr>
-        <p:txBody>
-          <a:bodyPr wrap="none" lIns="0" rIns="0" tIns="0" bIns="0" anchor="t">
-            <a:spAutoFit/>
-          </a:bodyPr>
-          <a:lstStyle/>
-          <a:p>
-            <a:pPr algn="l"/>
-            <a:r>
-              <a:rPr sz="760" b="0" i="0">
-                <a:solidFill>
-                  <a:srgbClr val="15795A"/>
-                </a:solidFill>
-                <a:latin typeface="Helvetica Neue"/>
-              </a:rPr>
-              <a:t>Shown first on purpose: a firewall only ever</a:t>
-            </a:r>
-          </a:p>
-        </p:txBody>
-      </p:sp>
-      <p:sp>
-        <p:nvSpPr>
-          <p:cNvPr id="29" name="TextBox 28"/>
-          <p:cNvSpPr txBox="1"/>
-          <p:nvPr/>
-        </p:nvSpPr>
-        <p:spPr>
-          <a:xfrm>
-            <a:off x="279400" y="4308602"/>
-            <a:ext cx="2453538" cy="208483"/>
-          </a:xfrm>
-          <a:prstGeom prst="rect">
-            <a:avLst/>
-          </a:prstGeom>
-          <a:noFill/>
-        </p:spPr>
-        <p:txBody>
-          <a:bodyPr wrap="none" lIns="0" rIns="0" tIns="0" bIns="0" anchor="t">
-            <a:spAutoFit/>
-          </a:bodyPr>
-          <a:lstStyle/>
-          <a:p>
-            <a:pPr algn="l"/>
-            <a:r>
-              <a:rPr sz="760" b="0" i="0">
-                <a:solidFill>
-                  <a:srgbClr val="15795A"/>
-                </a:solidFill>
-                <a:latin typeface="Helvetica Neue"/>
-              </a:rPr>
-              <a:t>seen blocking says nothing about its cost</a:t>
-            </a:r>
-          </a:p>
-        </p:txBody>
-      </p:sp>
-      <p:sp>
-        <p:nvSpPr>
-          <p:cNvPr id="30" name="TextBox 29"/>
-          <p:cNvSpPr txBox="1"/>
-          <p:nvPr/>
-        </p:nvSpPr>
-        <p:spPr>
-          <a:xfrm>
-            <a:off x="279400" y="4461002"/>
-            <a:ext cx="1316533" cy="208483"/>
-          </a:xfrm>
-          <a:prstGeom prst="rect">
-            <a:avLst/>
-          </a:prstGeom>
-          <a:noFill/>
-        </p:spPr>
-        <p:txBody>
-          <a:bodyPr wrap="none" lIns="0" rIns="0" tIns="0" bIns="0" anchor="t">
-            <a:spAutoFit/>
-          </a:bodyPr>
-          <a:lstStyle/>
-          <a:p>
-            <a:pPr algn="l"/>
-            <a:r>
-              <a:rPr sz="760" b="0" i="0">
-                <a:solidFill>
-                  <a:srgbClr val="15795A"/>
-                </a:solidFill>
-                <a:latin typeface="Helvetica Neue"/>
-              </a:rPr>
-              <a:t>when nothing is wrong.</a:t>
-            </a:r>
-          </a:p>
-        </p:txBody>
-      </p:sp>
-      <p:sp>
-        <p:nvSpPr>
-          <p:cNvPr id="31" name="Rounded Rectangle 30"/>
+              <a:t>sql="…; DROP TABLE audit_log; --"</a:t>
+            </a:r>
+          </a:p>
+        </p:txBody>
+      </p:sp>
+      <p:sp>
+        <p:nvSpPr>
+          <p:cNvPr id="32" name="Rounded Rectangle 31"/>
           <p:cNvSpPr/>
           <p:nvPr/>
         </p:nvSpPr>
         <p:spPr>
           <a:xfrm>
-            <a:off x="4495800" y="965200"/>
-            <a:ext cx="3810000" cy="279400"/>
+            <a:off x="4521200" y="1651000"/>
+            <a:ext cx="3759200" cy="2565400"/>
           </a:xfrm>
           <a:prstGeom prst="roundRect">
             <a:avLst>
-              <a:gd name="adj" fmla="val 22727"/>
+              <a:gd name="adj" fmla="val 3465"/>
             </a:avLst>
           </a:prstGeom>
           <a:solidFill>
-            <a:srgbClr val="F8FAFC"/>
+            <a:srgbClr val="FFFFFF"/>
           </a:solidFill>
-          <a:ln w="12700">
+          <a:ln w="20320">
             <a:solidFill>
-              <a:srgbClr val="E2E8F0"/>
+              <a:srgbClr val="DC2626"/>
             </a:solidFill>
           </a:ln>
           <a:effectLst/>
@@ -4182,16 +4239,40 @@
           <a:p/>
         </p:txBody>
       </p:sp>
-      <p:sp>
-        <p:nvSpPr>
-          <p:cNvPr id="32" name="TextBox 31"/>
+      <p:pic>
+        <p:nvPicPr>
+          <p:cNvPr id="33" name="Picture 32" descr="blockdemo-in-testagent.0.00-0.02-1.00-0.60.png"/>
+          <p:cNvPicPr>
+            <a:picLocks noChangeAspect="1"/>
+          </p:cNvPicPr>
+          <p:nvPr/>
+        </p:nvPicPr>
+        <p:blipFill>
+          <a:blip r:embed="rId6"/>
+          <a:stretch>
+            <a:fillRect/>
+          </a:stretch>
+        </p:blipFill>
+        <p:spPr>
+          <a:xfrm>
+            <a:off x="4559300" y="1689100"/>
+            <a:ext cx="3683000" cy="2489200"/>
+          </a:xfrm>
+          <a:prstGeom prst="rect">
+            <a:avLst/>
+          </a:prstGeom>
+        </p:spPr>
+      </p:pic>
+      <p:sp>
+        <p:nvSpPr>
+          <p:cNvPr id="34" name="TextBox 33"/>
           <p:cNvSpPr txBox="1"/>
           <p:nvPr/>
         </p:nvSpPr>
         <p:spPr>
           <a:xfrm>
-            <a:off x="4597400" y="1040689"/>
-            <a:ext cx="2166925" cy="175565"/>
+            <a:off x="4546600" y="4233545"/>
+            <a:ext cx="3551174" cy="301752"/>
           </a:xfrm>
           <a:prstGeom prst="rect">
             <a:avLst/>
@@ -4206,39 +4287,168 @@
           <a:p>
             <a:pPr algn="l"/>
             <a:r>
-              <a:rPr sz="640" b="0" i="0">
+              <a:rPr sz="1100" b="0" i="1">
                 <a:solidFill>
-                  <a:srgbClr val="334155"/>
+                  <a:srgbClr val="64748B"/>
                 </a:solidFill>
-                <a:latin typeface="Menlo"/>
+                <a:latin typeface="Helvetica Neue"/>
               </a:rPr>
-              <a:t>sql="SELECT * … ; DROP TABLE audit_log; --"</a:t>
-            </a:r>
-          </a:p>
-        </p:txBody>
-      </p:sp>
-      <p:sp>
-        <p:nvSpPr>
-          <p:cNvPr id="33" name="Rounded Rectangle 32"/>
+              <a:t>the agent's own conversation, unretouched</a:t>
+            </a:r>
+          </a:p>
+        </p:txBody>
+      </p:sp>
+      <p:pic>
+        <p:nvPicPr>
+          <p:cNvPr id="35" name="Picture 34" descr="circle-x--dc2626.256.png"/>
+          <p:cNvPicPr>
+            <a:picLocks noChangeAspect="1"/>
+          </p:cNvPicPr>
+          <p:nvPr/>
+        </p:nvPicPr>
+        <p:blipFill>
+          <a:blip r:embed="rId7"/>
+          <a:stretch>
+            <a:fillRect/>
+          </a:stretch>
+        </p:blipFill>
+        <p:spPr>
+          <a:xfrm>
+            <a:off x="4546600" y="4648200"/>
+            <a:ext cx="165100" cy="165100"/>
+          </a:xfrm>
+          <a:prstGeom prst="rect">
+            <a:avLst/>
+          </a:prstGeom>
+        </p:spPr>
+      </p:pic>
+      <p:sp>
+        <p:nvSpPr>
+          <p:cNvPr id="36" name="TextBox 35"/>
+          <p:cNvSpPr txBox="1"/>
+          <p:nvPr/>
+        </p:nvSpPr>
+        <p:spPr>
+          <a:xfrm>
+            <a:off x="4762500" y="4616386"/>
+            <a:ext cx="1421257" cy="260604"/>
+          </a:xfrm>
+          <a:prstGeom prst="rect">
+            <a:avLst/>
+          </a:prstGeom>
+          <a:noFill/>
+        </p:spPr>
+        <p:txBody>
+          <a:bodyPr wrap="none" lIns="0" rIns="0" tIns="0" bIns="0" anchor="t">
+            <a:spAutoFit/>
+          </a:bodyPr>
+          <a:lstStyle/>
+          <a:p>
+            <a:pPr algn="l"/>
+            <a:r>
+              <a:rPr sz="950" b="0" i="0">
+                <a:solidFill>
+                  <a:srgbClr val="DC2626"/>
+                </a:solidFill>
+                <a:latin typeface="Helvetica Neue"/>
+              </a:rPr>
+              <a:t>block at L1, 6.2 ms</a:t>
+            </a:r>
+          </a:p>
+        </p:txBody>
+      </p:sp>
+      <p:sp>
+        <p:nvSpPr>
+          <p:cNvPr id="37" name="TextBox 36"/>
+          <p:cNvSpPr txBox="1"/>
+          <p:nvPr/>
+        </p:nvSpPr>
+        <p:spPr>
+          <a:xfrm>
+            <a:off x="4546600" y="4879340"/>
+            <a:ext cx="3874008" cy="329184"/>
+          </a:xfrm>
+          <a:prstGeom prst="rect">
+            <a:avLst/>
+          </a:prstGeom>
+          <a:noFill/>
+        </p:spPr>
+        <p:txBody>
+          <a:bodyPr wrap="none" lIns="0" rIns="0" tIns="0" bIns="0" anchor="t">
+            <a:spAutoFit/>
+          </a:bodyPr>
+          <a:lstStyle/>
+          <a:p>
+            <a:pPr algn="l"/>
+            <a:r>
+              <a:rPr sz="1200" b="1" i="0">
+                <a:solidFill>
+                  <a:srgbClr val="A85F12"/>
+                </a:solidFill>
+                <a:latin typeface="Helvetica Neue"/>
+              </a:rPr>
+              <a:t>The refusal returns in-band, so the agent</a:t>
+            </a:r>
+          </a:p>
+        </p:txBody>
+      </p:sp>
+      <p:sp>
+        <p:nvSpPr>
+          <p:cNvPr id="38" name="TextBox 37"/>
+          <p:cNvSpPr txBox="1"/>
+          <p:nvPr/>
+        </p:nvSpPr>
+        <p:spPr>
+          <a:xfrm>
+            <a:off x="4546600" y="5082540"/>
+            <a:ext cx="3590544" cy="329184"/>
+          </a:xfrm>
+          <a:prstGeom prst="rect">
+            <a:avLst/>
+          </a:prstGeom>
+          <a:noFill/>
+        </p:spPr>
+        <p:txBody>
+          <a:bodyPr wrap="none" lIns="0" rIns="0" tIns="0" bIns="0" anchor="t">
+            <a:spAutoFit/>
+          </a:bodyPr>
+          <a:lstStyle/>
+          <a:p>
+            <a:pPr algn="l"/>
+            <a:r>
+              <a:rPr sz="1200" b="1" i="0">
+                <a:solidFill>
+                  <a:srgbClr val="A85F12"/>
+                </a:solidFill>
+                <a:latin typeface="Helvetica Neue"/>
+              </a:rPr>
+              <a:t>explains it and offers an alternative.</a:t>
+            </a:r>
+          </a:p>
+        </p:txBody>
+      </p:sp>
+      <p:sp>
+        <p:nvSpPr>
+          <p:cNvPr id="39" name="Rounded Rectangle 38"/>
           <p:cNvSpPr/>
           <p:nvPr/>
         </p:nvSpPr>
         <p:spPr>
           <a:xfrm>
-            <a:off x="4495800" y="1320800"/>
-            <a:ext cx="3810000" cy="1905000"/>
+            <a:off x="8737600" y="1193800"/>
+            <a:ext cx="3759200" cy="355600"/>
           </a:xfrm>
           <a:prstGeom prst="roundRect">
             <a:avLst>
-              <a:gd name="adj" fmla="val 4000"/>
+              <a:gd name="adj" fmla="val 17857"/>
             </a:avLst>
           </a:prstGeom>
           <a:solidFill>
-            <a:srgbClr val="FFFFFF"/>
+            <a:srgbClr val="F8FAFC"/>
           </a:solidFill>
-          <a:ln w="17780">
+          <a:ln w="12700">
             <a:solidFill>
-              <a:srgbClr val="DC2626"/>
+              <a:srgbClr val="E2E8F0"/>
             </a:solidFill>
           </a:ln>
           <a:effectLst/>
@@ -4263,40 +4473,16 @@
           <a:p/>
         </p:txBody>
       </p:sp>
-      <p:pic>
-        <p:nvPicPr>
-          <p:cNvPr id="34" name="Picture 33" descr="blockdemo-in-testagent.0.00-0.02-1.00-0.62.png"/>
-          <p:cNvPicPr>
-            <a:picLocks noChangeAspect="1"/>
-          </p:cNvPicPr>
-          <p:nvPr/>
-        </p:nvPicPr>
-        <p:blipFill>
-          <a:blip r:embed="rId8"/>
-          <a:stretch>
-            <a:fillRect/>
-          </a:stretch>
-        </p:blipFill>
-        <p:spPr>
-          <a:xfrm>
-            <a:off x="4533900" y="1358900"/>
-            <a:ext cx="3733800" cy="1828800"/>
-          </a:xfrm>
-          <a:prstGeom prst="rect">
-            <a:avLst/>
-          </a:prstGeom>
-        </p:spPr>
-      </p:pic>
-      <p:sp>
-        <p:nvSpPr>
-          <p:cNvPr id="35" name="TextBox 34"/>
+      <p:sp>
+        <p:nvSpPr>
+          <p:cNvPr id="40" name="TextBox 39"/>
           <p:cNvSpPr txBox="1"/>
           <p:nvPr/>
         </p:nvSpPr>
         <p:spPr>
           <a:xfrm>
-            <a:off x="4495800" y="3295523"/>
-            <a:ext cx="2388972" cy="202997"/>
+            <a:off x="8839200" y="1256220"/>
+            <a:ext cx="2173224" cy="315468"/>
           </a:xfrm>
           <a:prstGeom prst="rect">
             <a:avLst/>
@@ -4311,98 +4497,39 @@
           <a:p>
             <a:pPr algn="l"/>
             <a:r>
-              <a:rPr sz="740" b="0" i="1">
+              <a:rPr sz="1150" b="0" i="0">
                 <a:solidFill>
-                  <a:srgbClr val="64748B"/>
+                  <a:srgbClr val="334155"/>
                 </a:solidFill>
-                <a:latin typeface="Helvetica Neue"/>
+                <a:latin typeface="Menlo"/>
               </a:rPr>
-              <a:t>the agent's own conversation, unretouched</a:t>
-            </a:r>
-          </a:p>
-        </p:txBody>
-      </p:sp>
-      <p:pic>
-        <p:nvPicPr>
-          <p:cNvPr id="36" name="Picture 35" descr="circle-x--dc2626.256.png"/>
-          <p:cNvPicPr>
-            <a:picLocks noChangeAspect="1"/>
-          </p:cNvPicPr>
-          <p:nvPr/>
-        </p:nvPicPr>
-        <p:blipFill>
-          <a:blip r:embed="rId9"/>
-          <a:stretch>
-            <a:fillRect/>
-          </a:stretch>
-        </p:blipFill>
-        <p:spPr>
-          <a:xfrm>
-            <a:off x="4521200" y="3606800"/>
-            <a:ext cx="165100" cy="165100"/>
-          </a:xfrm>
-          <a:prstGeom prst="rect">
-            <a:avLst/>
-          </a:prstGeom>
-        </p:spPr>
-      </p:pic>
-      <p:sp>
-        <p:nvSpPr>
-          <p:cNvPr id="37" name="TextBox 36"/>
-          <p:cNvSpPr txBox="1"/>
-          <p:nvPr/>
-        </p:nvSpPr>
-        <p:spPr>
-          <a:xfrm>
-            <a:off x="4737100" y="3574986"/>
-            <a:ext cx="1421257" cy="260604"/>
-          </a:xfrm>
-          <a:prstGeom prst="rect">
-            <a:avLst/>
-          </a:prstGeom>
-          <a:noFill/>
-        </p:spPr>
-        <p:txBody>
-          <a:bodyPr wrap="none" lIns="0" rIns="0" tIns="0" bIns="0" anchor="t">
-            <a:spAutoFit/>
-          </a:bodyPr>
-          <a:lstStyle/>
-          <a:p>
-            <a:pPr algn="l"/>
-            <a:r>
-              <a:rPr sz="950" b="0" i="0">
-                <a:solidFill>
-                  <a:srgbClr val="DC2626"/>
-                </a:solidFill>
-                <a:latin typeface="Helvetica Neue"/>
-              </a:rPr>
-              <a:t>block at L1, 6.2 ms</a:t>
-            </a:r>
-          </a:p>
-        </p:txBody>
-      </p:sp>
-      <p:sp>
-        <p:nvSpPr>
-          <p:cNvPr id="38" name="Rounded Rectangle 37"/>
+              <a:t>policy: require_approval</a:t>
+            </a:r>
+          </a:p>
+        </p:txBody>
+      </p:sp>
+      <p:sp>
+        <p:nvSpPr>
+          <p:cNvPr id="41" name="Rounded Rectangle 40"/>
           <p:cNvSpPr/>
           <p:nvPr/>
         </p:nvSpPr>
         <p:spPr>
           <a:xfrm>
-            <a:off x="4495800" y="3835400"/>
-            <a:ext cx="3810000" cy="762000"/>
+            <a:off x="8737600" y="1651000"/>
+            <a:ext cx="3759200" cy="1295400"/>
           </a:xfrm>
           <a:prstGeom prst="roundRect">
             <a:avLst>
-              <a:gd name="adj" fmla="val 10000"/>
+              <a:gd name="adj" fmla="val 6862"/>
             </a:avLst>
           </a:prstGeom>
           <a:solidFill>
-            <a:srgbClr val="FDF1E7"/>
+            <a:srgbClr val="FFFFFF"/>
           </a:solidFill>
           <a:ln w="12700">
             <a:solidFill>
-              <a:srgbClr val="F0C9A0"/>
+              <a:srgbClr val="E2E8F0"/>
             </a:solidFill>
           </a:ln>
           <a:effectLst/>
@@ -4427,16 +4554,40 @@
           <a:p/>
         </p:txBody>
       </p:sp>
-      <p:sp>
-        <p:nvSpPr>
-          <p:cNvPr id="39" name="TextBox 38"/>
+      <p:pic>
+        <p:nvPicPr>
+          <p:cNvPr id="42" name="Picture 41" descr="pending.0.56-0.20-1.00-0.48.png"/>
+          <p:cNvPicPr>
+            <a:picLocks noChangeAspect="1"/>
+          </p:cNvPicPr>
+          <p:nvPr/>
+        </p:nvPicPr>
+        <p:blipFill>
+          <a:blip r:embed="rId8"/>
+          <a:stretch>
+            <a:fillRect/>
+          </a:stretch>
+        </p:blipFill>
+        <p:spPr>
+          <a:xfrm>
+            <a:off x="8775700" y="1689100"/>
+            <a:ext cx="3683000" cy="1219200"/>
+          </a:xfrm>
+          <a:prstGeom prst="rect">
+            <a:avLst/>
+          </a:prstGeom>
+        </p:spPr>
+      </p:pic>
+      <p:sp>
+        <p:nvSpPr>
+          <p:cNvPr id="43" name="TextBox 42"/>
           <p:cNvSpPr txBox="1"/>
           <p:nvPr/>
         </p:nvSpPr>
         <p:spPr>
           <a:xfrm>
-            <a:off x="4597400" y="3915918"/>
-            <a:ext cx="2447239" cy="230429"/>
+            <a:off x="8763000" y="2963545"/>
+            <a:ext cx="3724402" cy="301752"/>
           </a:xfrm>
           <a:prstGeom prst="rect">
             <a:avLst/>
@@ -4451,27 +4602,51 @@
           <a:p>
             <a:pPr algn="l"/>
             <a:r>
-              <a:rPr sz="840" b="1" i="0">
+              <a:rPr sz="1100" b="0" i="1">
                 <a:solidFill>
-                  <a:srgbClr val="A85F12"/>
+                  <a:srgbClr val="64748B"/>
                 </a:solidFill>
                 <a:latin typeface="Helvetica Neue"/>
               </a:rPr>
-              <a:t>The agent is not broken by the block.</a:t>
-            </a:r>
-          </a:p>
-        </p:txBody>
-      </p:sp>
-      <p:sp>
-        <p:nvSpPr>
-          <p:cNvPr id="40" name="TextBox 39"/>
+              <a:t>the held call — a second person presses one</a:t>
+            </a:r>
+          </a:p>
+        </p:txBody>
+      </p:sp>
+      <p:pic>
+        <p:nvPicPr>
+          <p:cNvPr id="44" name="Picture 43" descr="hand-stop--d97706.256.png"/>
+          <p:cNvPicPr>
+            <a:picLocks noChangeAspect="1"/>
+          </p:cNvPicPr>
+          <p:nvPr/>
+        </p:nvPicPr>
+        <p:blipFill>
+          <a:blip r:embed="rId9"/>
+          <a:stretch>
+            <a:fillRect/>
+          </a:stretch>
+        </p:blipFill>
+        <p:spPr>
+          <a:xfrm>
+            <a:off x="8763000" y="3276600"/>
+            <a:ext cx="190500" cy="190500"/>
+          </a:xfrm>
+          <a:prstGeom prst="rect">
+            <a:avLst/>
+          </a:prstGeom>
+        </p:spPr>
+      </p:pic>
+      <p:sp>
+        <p:nvSpPr>
+          <p:cNvPr id="45" name="TextBox 44"/>
           <p:cNvSpPr txBox="1"/>
           <p:nvPr/>
         </p:nvSpPr>
         <p:spPr>
           <a:xfrm>
-            <a:off x="4597400" y="4105402"/>
-            <a:ext cx="2692908" cy="208483"/>
+            <a:off x="9042400" y="3259138"/>
+            <a:ext cx="2755900" cy="342900"/>
           </a:xfrm>
           <a:prstGeom prst="rect">
             <a:avLst/>
@@ -4486,105 +4661,35 @@
           <a:p>
             <a:pPr algn="l"/>
             <a:r>
-              <a:rPr sz="760" b="0" i="0">
+              <a:rPr sz="1250" b="0" i="0">
                 <a:solidFill>
-                  <a:srgbClr val="A85F12"/>
+                  <a:srgbClr val="D97706"/>
                 </a:solidFill>
                 <a:latin typeface="Helvetica Neue"/>
               </a:rPr>
-              <a:t>The refusal returns in-band as a tool result,</a:t>
-            </a:r>
-          </a:p>
-        </p:txBody>
-      </p:sp>
-      <p:sp>
-        <p:nvSpPr>
-          <p:cNvPr id="41" name="TextBox 40"/>
-          <p:cNvSpPr txBox="1"/>
-          <p:nvPr/>
-        </p:nvSpPr>
-        <p:spPr>
-          <a:xfrm>
-            <a:off x="4597400" y="4257802"/>
-            <a:ext cx="2513381" cy="208483"/>
-          </a:xfrm>
-          <a:prstGeom prst="rect">
-            <a:avLst/>
-          </a:prstGeom>
-          <a:noFill/>
-        </p:spPr>
-        <p:txBody>
-          <a:bodyPr wrap="none" lIns="0" rIns="0" tIns="0" bIns="0" anchor="t">
-            <a:spAutoFit/>
-          </a:bodyPr>
-          <a:lstStyle/>
-          <a:p>
-            <a:pPr algn="l"/>
-            <a:r>
-              <a:rPr sz="760" b="0" i="0">
-                <a:solidFill>
-                  <a:srgbClr val="A85F12"/>
-                </a:solidFill>
-                <a:latin typeface="Helvetica Neue"/>
-              </a:rPr>
-              <a:t>so the model explains what was blocked and</a:t>
-            </a:r>
-          </a:p>
-        </p:txBody>
-      </p:sp>
-      <p:sp>
-        <p:nvSpPr>
-          <p:cNvPr id="42" name="TextBox 41"/>
-          <p:cNvSpPr txBox="1"/>
-          <p:nvPr/>
-        </p:nvSpPr>
-        <p:spPr>
-          <a:xfrm>
-            <a:off x="4597400" y="4410202"/>
-            <a:ext cx="1555902" cy="208483"/>
-          </a:xfrm>
-          <a:prstGeom prst="rect">
-            <a:avLst/>
-          </a:prstGeom>
-          <a:noFill/>
-        </p:spPr>
-        <p:txBody>
-          <a:bodyPr wrap="none" lIns="0" rIns="0" tIns="0" bIns="0" anchor="t">
-            <a:spAutoFit/>
-          </a:bodyPr>
-          <a:lstStyle/>
-          <a:p>
-            <a:pPr algn="l"/>
-            <a:r>
-              <a:rPr sz="760" b="0" i="0">
-                <a:solidFill>
-                  <a:srgbClr val="A85F12"/>
-                </a:solidFill>
-                <a:latin typeface="Helvetica Neue"/>
-              </a:rPr>
-              <a:t>offers a safe alternative.</a:t>
-            </a:r>
-          </a:p>
-        </p:txBody>
-      </p:sp>
-      <p:sp>
-        <p:nvSpPr>
-          <p:cNvPr id="43" name="Rounded Rectangle 42"/>
+              <a:t>pending — the agent suspends</a:t>
+            </a:r>
+          </a:p>
+        </p:txBody>
+      </p:sp>
+      <p:sp>
+        <p:nvSpPr>
+          <p:cNvPr id="46" name="Rounded Rectangle 45"/>
           <p:cNvSpPr/>
           <p:nvPr/>
         </p:nvSpPr>
         <p:spPr>
           <a:xfrm>
-            <a:off x="8712200" y="965200"/>
-            <a:ext cx="3810000" cy="279400"/>
+            <a:off x="8737600" y="3606800"/>
+            <a:ext cx="3759200" cy="787400"/>
           </a:xfrm>
           <a:prstGeom prst="roundRect">
             <a:avLst>
-              <a:gd name="adj" fmla="val 22727"/>
+              <a:gd name="adj" fmla="val 11290"/>
             </a:avLst>
           </a:prstGeom>
           <a:solidFill>
-            <a:srgbClr val="F8FAFC"/>
+            <a:srgbClr val="FFFFFF"/>
           </a:solidFill>
           <a:ln w="12700">
             <a:solidFill>
@@ -4613,90 +4718,9 @@
           <a:p/>
         </p:txBody>
       </p:sp>
-      <p:sp>
-        <p:nvSpPr>
-          <p:cNvPr id="44" name="TextBox 43"/>
-          <p:cNvSpPr txBox="1"/>
-          <p:nvPr/>
-        </p:nvSpPr>
-        <p:spPr>
-          <a:xfrm>
-            <a:off x="8813800" y="1032662"/>
-            <a:ext cx="1360627" cy="197510"/>
-          </a:xfrm>
-          <a:prstGeom prst="rect">
-            <a:avLst/>
-          </a:prstGeom>
-          <a:noFill/>
-        </p:spPr>
-        <p:txBody>
-          <a:bodyPr wrap="none" lIns="0" rIns="0" tIns="0" bIns="0" anchor="t">
-            <a:spAutoFit/>
-          </a:bodyPr>
-          <a:lstStyle/>
-          <a:p>
-            <a:pPr algn="l"/>
-            <a:r>
-              <a:rPr sz="720" b="0" i="0">
-                <a:solidFill>
-                  <a:srgbClr val="334155"/>
-                </a:solidFill>
-                <a:latin typeface="Menlo"/>
-              </a:rPr>
-              <a:t>policy: require_approval</a:t>
-            </a:r>
-          </a:p>
-        </p:txBody>
-      </p:sp>
-      <p:sp>
-        <p:nvSpPr>
-          <p:cNvPr id="45" name="Rounded Rectangle 44"/>
-          <p:cNvSpPr/>
-          <p:nvPr/>
-        </p:nvSpPr>
-        <p:spPr>
-          <a:xfrm>
-            <a:off x="8712200" y="1320800"/>
-            <a:ext cx="3810000" cy="1473200"/>
-          </a:xfrm>
-          <a:prstGeom prst="roundRect">
-            <a:avLst>
-              <a:gd name="adj" fmla="val 5172"/>
-            </a:avLst>
-          </a:prstGeom>
-          <a:solidFill>
-            <a:srgbClr val="FFFFFF"/>
-          </a:solidFill>
-          <a:ln w="12700">
-            <a:solidFill>
-              <a:srgbClr val="E2E8F0"/>
-            </a:solidFill>
-          </a:ln>
-          <a:effectLst/>
-        </p:spPr>
-        <p:style>
-          <a:lnRef idx="1">
-            <a:schemeClr val="accent1"/>
-          </a:lnRef>
-          <a:fillRef idx="3">
-            <a:schemeClr val="accent1"/>
-          </a:fillRef>
-          <a:effectRef idx="2">
-            <a:schemeClr val="accent1"/>
-          </a:effectRef>
-          <a:fontRef idx="minor">
-            <a:schemeClr val="lt1"/>
-          </a:fontRef>
-        </p:style>
-        <p:txBody>
-          <a:bodyPr rtlCol="0" anchor="ctr"/>
-          <a:lstStyle/>
-          <a:p/>
-        </p:txBody>
-      </p:sp>
       <p:pic>
         <p:nvPicPr>
-          <p:cNvPr id="46" name="Picture 45" descr="pending.0.11-0.15-1.00-0.73.png"/>
+          <p:cNvPr id="47" name="Picture 46" descr="users--64748b.256.png"/>
           <p:cNvPicPr>
             <a:picLocks noChangeAspect="1"/>
           </p:cNvPicPr>
@@ -4710,8 +4734,8 @@
         </p:blipFill>
         <p:spPr>
           <a:xfrm>
-            <a:off x="8750300" y="1358900"/>
-            <a:ext cx="3733800" cy="1397000"/>
+            <a:off x="8864600" y="3733800"/>
+            <a:ext cx="190500" cy="190500"/>
           </a:xfrm>
           <a:prstGeom prst="rect">
             <a:avLst/>
@@ -4720,14 +4744,14 @@
       </p:pic>
       <p:sp>
         <p:nvSpPr>
-          <p:cNvPr id="47" name="TextBox 46"/>
+          <p:cNvPr id="48" name="TextBox 47"/>
           <p:cNvSpPr txBox="1"/>
           <p:nvPr/>
         </p:nvSpPr>
         <p:spPr>
           <a:xfrm>
-            <a:off x="8712200" y="2863723"/>
-            <a:ext cx="2214169" cy="202997"/>
+            <a:off x="9169400" y="3716338"/>
+            <a:ext cx="2460625" cy="342900"/>
           </a:xfrm>
           <a:prstGeom prst="rect">
             <a:avLst/>
@@ -4742,171 +4766,7 @@
           <a:p>
             <a:pPr algn="l"/>
             <a:r>
-              <a:rPr sz="740" b="0" i="1">
-                <a:solidFill>
-                  <a:srgbClr val="64748B"/>
-                </a:solidFill>
-                <a:latin typeface="Helvetica Neue"/>
-              </a:rPr>
-              <a:t>approval queue, full arguments visible</a:t>
-            </a:r>
-          </a:p>
-        </p:txBody>
-      </p:sp>
-      <p:pic>
-        <p:nvPicPr>
-          <p:cNvPr id="48" name="Picture 47" descr="hand-stop--d97706.256.png"/>
-          <p:cNvPicPr>
-            <a:picLocks noChangeAspect="1"/>
-          </p:cNvPicPr>
-          <p:nvPr/>
-        </p:nvPicPr>
-        <p:blipFill>
-          <a:blip r:embed="rId11"/>
-          <a:stretch>
-            <a:fillRect/>
-          </a:stretch>
-        </p:blipFill>
-        <p:spPr>
-          <a:xfrm>
-            <a:off x="8737600" y="3175000"/>
-            <a:ext cx="165100" cy="165100"/>
-          </a:xfrm>
-          <a:prstGeom prst="rect">
-            <a:avLst/>
-          </a:prstGeom>
-        </p:spPr>
-      </p:pic>
-      <p:sp>
-        <p:nvSpPr>
-          <p:cNvPr id="49" name="TextBox 48"/>
-          <p:cNvSpPr txBox="1"/>
-          <p:nvPr/>
-        </p:nvSpPr>
-        <p:spPr>
-          <a:xfrm>
-            <a:off x="8991600" y="3192018"/>
-            <a:ext cx="1851965" cy="230429"/>
-          </a:xfrm>
-          <a:prstGeom prst="rect">
-            <a:avLst/>
-          </a:prstGeom>
-          <a:noFill/>
-        </p:spPr>
-        <p:txBody>
-          <a:bodyPr wrap="none" lIns="0" rIns="0" tIns="0" bIns="0" anchor="t">
-            <a:spAutoFit/>
-          </a:bodyPr>
-          <a:lstStyle/>
-          <a:p>
-            <a:pPr algn="l"/>
-            <a:r>
-              <a:rPr sz="840" b="0" i="0">
-                <a:solidFill>
-                  <a:srgbClr val="D97706"/>
-                </a:solidFill>
-                <a:latin typeface="Helvetica Neue"/>
-              </a:rPr>
-              <a:t>pending — the agent suspends</a:t>
-            </a:r>
-          </a:p>
-        </p:txBody>
-      </p:sp>
-      <p:sp>
-        <p:nvSpPr>
-          <p:cNvPr id="50" name="Rounded Rectangle 49"/>
-          <p:cNvSpPr/>
-          <p:nvPr/>
-        </p:nvSpPr>
-        <p:spPr>
-          <a:xfrm>
-            <a:off x="8712200" y="3454400"/>
-            <a:ext cx="3810000" cy="558800"/>
-          </a:xfrm>
-          <a:prstGeom prst="roundRect">
-            <a:avLst>
-              <a:gd name="adj" fmla="val 13636"/>
-            </a:avLst>
-          </a:prstGeom>
-          <a:solidFill>
-            <a:srgbClr val="FFFFFF"/>
-          </a:solidFill>
-          <a:ln w="12700">
-            <a:solidFill>
-              <a:srgbClr val="E2E8F0"/>
-            </a:solidFill>
-          </a:ln>
-          <a:effectLst/>
-        </p:spPr>
-        <p:style>
-          <a:lnRef idx="1">
-            <a:schemeClr val="accent1"/>
-          </a:lnRef>
-          <a:fillRef idx="3">
-            <a:schemeClr val="accent1"/>
-          </a:fillRef>
-          <a:effectRef idx="2">
-            <a:schemeClr val="accent1"/>
-          </a:effectRef>
-          <a:fontRef idx="minor">
-            <a:schemeClr val="lt1"/>
-          </a:fontRef>
-        </p:style>
-        <p:txBody>
-          <a:bodyPr rtlCol="0" anchor="ctr"/>
-          <a:lstStyle/>
-          <a:p/>
-        </p:txBody>
-      </p:sp>
-      <p:pic>
-        <p:nvPicPr>
-          <p:cNvPr id="51" name="Picture 50" descr="users--64748b.256.png"/>
-          <p:cNvPicPr>
-            <a:picLocks noChangeAspect="1"/>
-          </p:cNvPicPr>
-          <p:nvPr/>
-        </p:nvPicPr>
-        <p:blipFill>
-          <a:blip r:embed="rId12"/>
-          <a:stretch>
-            <a:fillRect/>
-          </a:stretch>
-        </p:blipFill>
-        <p:spPr>
-          <a:xfrm>
-            <a:off x="8813800" y="3556000"/>
-            <a:ext cx="165100" cy="165100"/>
-          </a:xfrm>
-          <a:prstGeom prst="rect">
-            <a:avLst/>
-          </a:prstGeom>
-        </p:spPr>
-      </p:pic>
-      <p:sp>
-        <p:nvSpPr>
-          <p:cNvPr id="52" name="TextBox 51"/>
-          <p:cNvSpPr txBox="1"/>
-          <p:nvPr/>
-        </p:nvSpPr>
-        <p:spPr>
-          <a:xfrm>
-            <a:off x="9067800" y="3573018"/>
-            <a:ext cx="1653540" cy="230429"/>
-          </a:xfrm>
-          <a:prstGeom prst="rect">
-            <a:avLst/>
-          </a:prstGeom>
-          <a:noFill/>
-        </p:spPr>
-        <p:txBody>
-          <a:bodyPr wrap="none" lIns="0" rIns="0" tIns="0" bIns="0" anchor="t">
-            <a:spAutoFit/>
-          </a:bodyPr>
-          <a:lstStyle/>
-          <a:p>
-            <a:pPr algn="l"/>
-            <a:r>
-              <a:rPr sz="840" b="0" i="0">
+              <a:rPr sz="1250" b="0" i="0">
                 <a:solidFill>
                   <a:srgbClr val="1F2937"/>
                 </a:solidFill>
@@ -4919,14 +4779,14 @@
       </p:sp>
       <p:sp>
         <p:nvSpPr>
-          <p:cNvPr id="53" name="TextBox 52"/>
+          <p:cNvPr id="49" name="TextBox 48"/>
           <p:cNvSpPr txBox="1"/>
           <p:nvPr/>
         </p:nvSpPr>
         <p:spPr>
           <a:xfrm>
-            <a:off x="8813800" y="3803523"/>
-            <a:ext cx="2447239" cy="202997"/>
+            <a:off x="8864600" y="4048442"/>
+            <a:ext cx="3078734" cy="315468"/>
           </a:xfrm>
           <a:prstGeom prst="rect">
             <a:avLst/>
@@ -4941,27 +4801,27 @@
           <a:p>
             <a:pPr algn="l"/>
             <a:r>
-              <a:rPr sz="740" b="0" i="0">
+              <a:rPr sz="1150" b="0" i="0">
                 <a:solidFill>
                   <a:srgbClr val="64748B"/>
                 </a:solidFill>
                 <a:latin typeface="Helvetica Neue"/>
               </a:rPr>
-              <a:t>agent resumes within one 2 s polling cycle</a:t>
-            </a:r>
-          </a:p>
-        </p:txBody>
-      </p:sp>
-      <p:sp>
-        <p:nvSpPr>
-          <p:cNvPr id="54" name="TextBox 53"/>
+              <a:t>agent resumes within one 2 s cycle</a:t>
+            </a:r>
+          </a:p>
+        </p:txBody>
+      </p:sp>
+      <p:sp>
+        <p:nvSpPr>
+          <p:cNvPr id="50" name="TextBox 49"/>
           <p:cNvSpPr txBox="1"/>
           <p:nvPr/>
         </p:nvSpPr>
         <p:spPr>
           <a:xfrm>
-            <a:off x="8712200" y="4156202"/>
-            <a:ext cx="2393696" cy="208483"/>
+            <a:off x="8763000" y="4498340"/>
+            <a:ext cx="2834640" cy="329184"/>
           </a:xfrm>
           <a:prstGeom prst="rect">
             <a:avLst/>
@@ -4976,27 +4836,27 @@
           <a:p>
             <a:pPr algn="l"/>
             <a:r>
-              <a:rPr sz="760" b="0" i="0">
+              <a:rPr sz="1200" b="1" i="0">
                 <a:solidFill>
                   <a:srgbClr val="6D3FBF"/>
                 </a:solidFill>
                 <a:latin typeface="Helvetica Neue"/>
               </a:rPr>
-              <a:t>Passing a decision between two people is</a:t>
-            </a:r>
-          </a:p>
-        </p:txBody>
-      </p:sp>
-      <p:sp>
-        <p:nvSpPr>
-          <p:cNvPr id="55" name="TextBox 54"/>
+              <a:t>Passing a decision between two</a:t>
+            </a:r>
+          </a:p>
+        </p:txBody>
+      </p:sp>
+      <p:sp>
+        <p:nvSpPr>
+          <p:cNvPr id="51" name="TextBox 50"/>
           <p:cNvSpPr txBox="1"/>
           <p:nvPr/>
         </p:nvSpPr>
         <p:spPr>
           <a:xfrm>
-            <a:off x="8712200" y="4308602"/>
-            <a:ext cx="2034642" cy="208483"/>
+            <a:off x="8763000" y="4701540"/>
+            <a:ext cx="3212592" cy="329184"/>
           </a:xfrm>
           <a:prstGeom prst="rect">
             <a:avLst/>
@@ -5011,27 +4871,27 @@
           <a:p>
             <a:pPr algn="l"/>
             <a:r>
-              <a:rPr sz="760" b="0" i="0">
+              <a:rPr sz="1200" b="1" i="0">
                 <a:solidFill>
                   <a:srgbClr val="6D3FBF"/>
                 </a:solidFill>
                 <a:latin typeface="Helvetica Neue"/>
               </a:rPr>
-              <a:t>the part that is hard on paper and</a:t>
-            </a:r>
-          </a:p>
-        </p:txBody>
-      </p:sp>
-      <p:sp>
-        <p:nvSpPr>
-          <p:cNvPr id="56" name="TextBox 55"/>
+              <a:t>people is the part that is hard on</a:t>
+            </a:r>
+          </a:p>
+        </p:txBody>
+      </p:sp>
+      <p:sp>
+        <p:nvSpPr>
+          <p:cNvPr id="52" name="TextBox 51"/>
           <p:cNvSpPr txBox="1"/>
           <p:nvPr/>
         </p:nvSpPr>
         <p:spPr>
           <a:xfrm>
-            <a:off x="8712200" y="4461002"/>
-            <a:ext cx="1196848" cy="208483"/>
+            <a:off x="8763000" y="4904740"/>
+            <a:ext cx="2834640" cy="329184"/>
           </a:xfrm>
           <a:prstGeom prst="rect">
             <a:avLst/>
@@ -5046,13 +4906,13 @@
           <a:p>
             <a:pPr algn="l"/>
             <a:r>
-              <a:rPr sz="760" b="0" i="0">
+              <a:rPr sz="1200" b="1" i="0">
                 <a:solidFill>
                   <a:srgbClr val="6D3FBF"/>
                 </a:solidFill>
                 <a:latin typeface="Helvetica Neue"/>
               </a:rPr>
-              <a:t>immediate in person.</a:t>
+              <a:t>paper and immediate in person.</a:t>
             </a:r>
           </a:p>
         </p:txBody>

--- a/research/paper-arxiv/images/demo_walkthrough.pptx
+++ b/research/paper-arxiv/images/demo_walkthrough.pptx
@@ -3105,11 +3105,11 @@
             </a:avLst>
           </a:prstGeom>
           <a:solidFill>
-            <a:srgbClr val="EAF6F0"/>
+            <a:srgbClr val="FFFFFF"/>
           </a:solidFill>
           <a:ln w="12700">
             <a:solidFill>
-              <a:srgbClr val="A8D8C0"/>
+              <a:srgbClr val="EBEBEB"/>
             </a:solidFill>
           </a:ln>
           <a:effectLst/>
@@ -3160,7 +3160,7 @@
             <a:r>
               <a:rPr sz="1500" b="1" i="0">
                 <a:solidFill>
-                  <a:srgbClr val="15795A"/>
+                  <a:srgbClr val="171717"/>
                 </a:solidFill>
                 <a:latin typeface="Helvetica Neue"/>
               </a:rPr>
@@ -3171,7 +3171,7 @@
       </p:sp>
       <p:pic>
         <p:nvPicPr>
-          <p:cNvPr id="4" name="Picture 3" descr="keyboard--15795a.256.png"/>
+          <p:cNvPr id="4" name="Picture 3" descr="keyboard--171717.256.png"/>
           <p:cNvPicPr>
             <a:picLocks noChangeAspect="1"/>
           </p:cNvPicPr>
@@ -3214,7 +3214,7 @@
           </a:solidFill>
           <a:ln w="12700">
             <a:solidFill>
-              <a:srgbClr val="E2E8F0"/>
+              <a:srgbClr val="F0F0F0"/>
             </a:solidFill>
           </a:ln>
           <a:effectLst/>
@@ -3265,7 +3265,7 @@
             <a:r>
               <a:rPr sz="1150" b="0" i="1">
                 <a:solidFill>
-                  <a:srgbClr val="1F2937"/>
+                  <a:srgbClr val="171717"/>
                 </a:solidFill>
                 <a:latin typeface="Helvetica Neue"/>
               </a:rPr>
@@ -3291,11 +3291,11 @@
             </a:avLst>
           </a:prstGeom>
           <a:solidFill>
-            <a:srgbClr val="FDF1E7"/>
+            <a:srgbClr val="FFFFFF"/>
           </a:solidFill>
           <a:ln w="12700">
             <a:solidFill>
-              <a:srgbClr val="F0C9A0"/>
+              <a:srgbClr val="EBEBEB"/>
             </a:solidFill>
           </a:ln>
           <a:effectLst/>
@@ -3346,7 +3346,7 @@
             <a:r>
               <a:rPr sz="1500" b="1" i="0">
                 <a:solidFill>
-                  <a:srgbClr val="A85F12"/>
+                  <a:srgbClr val="171717"/>
                 </a:solidFill>
                 <a:latin typeface="Helvetica Neue"/>
               </a:rPr>
@@ -3357,14 +3357,14 @@
       </p:sp>
       <p:pic>
         <p:nvPicPr>
-          <p:cNvPr id="9" name="Picture 8" descr="keyboard--a85f12.256.png"/>
+          <p:cNvPr id="9" name="Picture 8" descr="keyboard--171717.256.png"/>
           <p:cNvPicPr>
             <a:picLocks noChangeAspect="1"/>
           </p:cNvPicPr>
           <p:nvPr/>
         </p:nvPicPr>
         <p:blipFill>
-          <a:blip r:embed="rId3"/>
+          <a:blip r:embed="rId2"/>
           <a:stretch>
             <a:fillRect/>
           </a:stretch>
@@ -3400,7 +3400,7 @@
           </a:solidFill>
           <a:ln w="12700">
             <a:solidFill>
-              <a:srgbClr val="E2E8F0"/>
+              <a:srgbClr val="F0F0F0"/>
             </a:solidFill>
           </a:ln>
           <a:effectLst/>
@@ -3451,7 +3451,7 @@
             <a:r>
               <a:rPr sz="1150" b="0" i="1">
                 <a:solidFill>
-                  <a:srgbClr val="1F2937"/>
+                  <a:srgbClr val="171717"/>
                 </a:solidFill>
                 <a:latin typeface="Helvetica Neue"/>
               </a:rPr>
@@ -3477,11 +3477,11 @@
             </a:avLst>
           </a:prstGeom>
           <a:solidFill>
-            <a:srgbClr val="F3EEFB"/>
+            <a:srgbClr val="FFFFFF"/>
           </a:solidFill>
           <a:ln w="12700">
             <a:solidFill>
-              <a:srgbClr val="C7B4EC"/>
+              <a:srgbClr val="EBEBEB"/>
             </a:solidFill>
           </a:ln>
           <a:effectLst/>
@@ -3532,7 +3532,7 @@
             <a:r>
               <a:rPr sz="1500" b="1" i="0">
                 <a:solidFill>
-                  <a:srgbClr val="6D3FBF"/>
+                  <a:srgbClr val="171717"/>
                 </a:solidFill>
                 <a:latin typeface="Helvetica Neue"/>
               </a:rPr>
@@ -3543,14 +3543,14 @@
       </p:sp>
       <p:pic>
         <p:nvPicPr>
-          <p:cNvPr id="14" name="Picture 13" descr="keyboard--6d3fbf.256.png"/>
+          <p:cNvPr id="14" name="Picture 13" descr="keyboard--171717.256.png"/>
           <p:cNvPicPr>
             <a:picLocks noChangeAspect="1"/>
           </p:cNvPicPr>
           <p:nvPr/>
         </p:nvPicPr>
         <p:blipFill>
-          <a:blip r:embed="rId4"/>
+          <a:blip r:embed="rId2"/>
           <a:stretch>
             <a:fillRect/>
           </a:stretch>
@@ -3586,7 +3586,7 @@
           </a:solidFill>
           <a:ln w="12700">
             <a:solidFill>
-              <a:srgbClr val="E2E8F0"/>
+              <a:srgbClr val="F0F0F0"/>
             </a:solidFill>
           </a:ln>
           <a:effectLst/>
@@ -3637,7 +3637,7 @@
             <a:r>
               <a:rPr sz="1150" b="0" i="1">
                 <a:solidFill>
-                  <a:srgbClr val="1F2937"/>
+                  <a:srgbClr val="171717"/>
                 </a:solidFill>
                 <a:latin typeface="Helvetica Neue"/>
               </a:rPr>
@@ -3663,11 +3663,11 @@
             </a:avLst>
           </a:prstGeom>
           <a:solidFill>
-            <a:srgbClr val="F8FAFC"/>
+            <a:srgbClr val="FAFAFA"/>
           </a:solidFill>
           <a:ln w="12700">
             <a:solidFill>
-              <a:srgbClr val="E2E8F0"/>
+              <a:srgbClr val="F0F0F0"/>
             </a:solidFill>
           </a:ln>
           <a:effectLst/>
@@ -3718,7 +3718,7 @@
             <a:r>
               <a:rPr sz="1150" b="0" i="0">
                 <a:solidFill>
-                  <a:srgbClr val="334155"/>
+                  <a:srgbClr val="4D4D4D"/>
                 </a:solidFill>
                 <a:latin typeface="Menlo"/>
               </a:rPr>
@@ -3729,14 +3729,14 @@
       </p:sp>
       <p:pic>
         <p:nvPicPr>
-          <p:cNvPr id="19" name="Picture 18" descr="circle-check--16a34a.256.png"/>
+          <p:cNvPr id="19" name="Picture 18" descr="circle-check--0e8a5f.256.png"/>
           <p:cNvPicPr>
             <a:picLocks noChangeAspect="1"/>
           </p:cNvPicPr>
           <p:nvPr/>
         </p:nvPicPr>
         <p:blipFill>
-          <a:blip r:embed="rId5"/>
+          <a:blip r:embed="rId3"/>
           <a:stretch>
             <a:fillRect/>
           </a:stretch>
@@ -3777,7 +3777,7 @@
             <a:r>
               <a:rPr sz="950" b="0" i="0">
                 <a:solidFill>
-                  <a:srgbClr val="16A34A"/>
+                  <a:srgbClr val="0E8A5F"/>
                 </a:solidFill>
                 <a:latin typeface="Helvetica Neue"/>
               </a:rPr>
@@ -3807,7 +3807,7 @@
           </a:solidFill>
           <a:ln w="12700">
             <a:solidFill>
-              <a:srgbClr val="E2E8F0"/>
+              <a:srgbClr val="F0F0F0"/>
             </a:solidFill>
           </a:ln>
           <a:effectLst/>
@@ -3858,7 +3858,7 @@
             <a:r>
               <a:rPr sz="2600" b="1" i="0">
                 <a:solidFill>
-                  <a:srgbClr val="16A34A"/>
+                  <a:srgbClr val="0E8A5F"/>
                 </a:solidFill>
                 <a:latin typeface="Helvetica Neue"/>
               </a:rPr>
@@ -3893,7 +3893,7 @@
             <a:r>
               <a:rPr sz="1200" b="0" i="0">
                 <a:solidFill>
-                  <a:srgbClr val="64748B"/>
+                  <a:srgbClr val="4D4D4D"/>
                 </a:solidFill>
                 <a:latin typeface="Helvetica Neue"/>
               </a:rPr>
@@ -3928,7 +3928,7 @@
             <a:r>
               <a:rPr sz="1150" b="0" i="0">
                 <a:solidFill>
-                  <a:srgbClr val="64748B"/>
+                  <a:srgbClr val="4D4D4D"/>
                 </a:solidFill>
                 <a:latin typeface="Helvetica Neue"/>
               </a:rPr>
@@ -3963,7 +3963,7 @@
             <a:r>
               <a:rPr sz="1250" b="1" i="0">
                 <a:solidFill>
-                  <a:srgbClr val="15795A"/>
+                  <a:srgbClr val="171717"/>
                 </a:solidFill>
                 <a:latin typeface="Helvetica Neue"/>
               </a:rPr>
@@ -3998,7 +3998,7 @@
             <a:r>
               <a:rPr sz="1200" b="0" i="0">
                 <a:solidFill>
-                  <a:srgbClr val="15795A"/>
+                  <a:srgbClr val="171717"/>
                 </a:solidFill>
                 <a:latin typeface="Helvetica Neue"/>
               </a:rPr>
@@ -4033,7 +4033,7 @@
             <a:r>
               <a:rPr sz="1200" b="0" i="0">
                 <a:solidFill>
-                  <a:srgbClr val="15795A"/>
+                  <a:srgbClr val="171717"/>
                 </a:solidFill>
                 <a:latin typeface="Helvetica Neue"/>
               </a:rPr>
@@ -4068,7 +4068,7 @@
             <a:r>
               <a:rPr sz="1200" b="0" i="0">
                 <a:solidFill>
-                  <a:srgbClr val="15795A"/>
+                  <a:srgbClr val="171717"/>
                 </a:solidFill>
                 <a:latin typeface="Helvetica Neue"/>
               </a:rPr>
@@ -4103,7 +4103,7 @@
             <a:r>
               <a:rPr sz="1200" b="0" i="0">
                 <a:solidFill>
-                  <a:srgbClr val="15795A"/>
+                  <a:srgbClr val="171717"/>
                 </a:solidFill>
                 <a:latin typeface="Helvetica Neue"/>
               </a:rPr>
@@ -4129,11 +4129,11 @@
             </a:avLst>
           </a:prstGeom>
           <a:solidFill>
-            <a:srgbClr val="F8FAFC"/>
+            <a:srgbClr val="FAFAFA"/>
           </a:solidFill>
           <a:ln w="12700">
             <a:solidFill>
-              <a:srgbClr val="E2E8F0"/>
+              <a:srgbClr val="F0F0F0"/>
             </a:solidFill>
           </a:ln>
           <a:effectLst/>
@@ -4184,7 +4184,7 @@
             <a:r>
               <a:rPr sz="1100" b="0" i="0">
                 <a:solidFill>
-                  <a:srgbClr val="334155"/>
+                  <a:srgbClr val="4D4D4D"/>
                 </a:solidFill>
                 <a:latin typeface="Menlo"/>
               </a:rPr>
@@ -4214,7 +4214,7 @@
           </a:solidFill>
           <a:ln w="20320">
             <a:solidFill>
-              <a:srgbClr val="DC2626"/>
+              <a:srgbClr val="D40000"/>
             </a:solidFill>
           </a:ln>
           <a:effectLst/>
@@ -4248,7 +4248,7 @@
           <p:nvPr/>
         </p:nvPicPr>
         <p:blipFill>
-          <a:blip r:embed="rId6"/>
+          <a:blip r:embed="rId4"/>
           <a:stretch>
             <a:fillRect/>
           </a:stretch>
@@ -4289,7 +4289,7 @@
             <a:r>
               <a:rPr sz="1100" b="0" i="1">
                 <a:solidFill>
-                  <a:srgbClr val="64748B"/>
+                  <a:srgbClr val="4D4D4D"/>
                 </a:solidFill>
                 <a:latin typeface="Helvetica Neue"/>
               </a:rPr>
@@ -4300,14 +4300,14 @@
       </p:sp>
       <p:pic>
         <p:nvPicPr>
-          <p:cNvPr id="35" name="Picture 34" descr="circle-x--dc2626.256.png"/>
+          <p:cNvPr id="35" name="Picture 34" descr="circle-x--d40000.256.png"/>
           <p:cNvPicPr>
             <a:picLocks noChangeAspect="1"/>
           </p:cNvPicPr>
           <p:nvPr/>
         </p:nvPicPr>
         <p:blipFill>
-          <a:blip r:embed="rId7"/>
+          <a:blip r:embed="rId5"/>
           <a:stretch>
             <a:fillRect/>
           </a:stretch>
@@ -4348,7 +4348,7 @@
             <a:r>
               <a:rPr sz="950" b="0" i="0">
                 <a:solidFill>
-                  <a:srgbClr val="DC2626"/>
+                  <a:srgbClr val="D40000"/>
                 </a:solidFill>
                 <a:latin typeface="Helvetica Neue"/>
               </a:rPr>
@@ -4383,7 +4383,7 @@
             <a:r>
               <a:rPr sz="1200" b="1" i="0">
                 <a:solidFill>
-                  <a:srgbClr val="A85F12"/>
+                  <a:srgbClr val="171717"/>
                 </a:solidFill>
                 <a:latin typeface="Helvetica Neue"/>
               </a:rPr>
@@ -4418,7 +4418,7 @@
             <a:r>
               <a:rPr sz="1200" b="1" i="0">
                 <a:solidFill>
-                  <a:srgbClr val="A85F12"/>
+                  <a:srgbClr val="171717"/>
                 </a:solidFill>
                 <a:latin typeface="Helvetica Neue"/>
               </a:rPr>
@@ -4444,11 +4444,11 @@
             </a:avLst>
           </a:prstGeom>
           <a:solidFill>
-            <a:srgbClr val="F8FAFC"/>
+            <a:srgbClr val="FAFAFA"/>
           </a:solidFill>
           <a:ln w="12700">
             <a:solidFill>
-              <a:srgbClr val="E2E8F0"/>
+              <a:srgbClr val="F0F0F0"/>
             </a:solidFill>
           </a:ln>
           <a:effectLst/>
@@ -4499,7 +4499,7 @@
             <a:r>
               <a:rPr sz="1150" b="0" i="0">
                 <a:solidFill>
-                  <a:srgbClr val="334155"/>
+                  <a:srgbClr val="4D4D4D"/>
                 </a:solidFill>
                 <a:latin typeface="Menlo"/>
               </a:rPr>
@@ -4529,7 +4529,7 @@
           </a:solidFill>
           <a:ln w="12700">
             <a:solidFill>
-              <a:srgbClr val="E2E8F0"/>
+              <a:srgbClr val="F0F0F0"/>
             </a:solidFill>
           </a:ln>
           <a:effectLst/>
@@ -4563,7 +4563,7 @@
           <p:nvPr/>
         </p:nvPicPr>
         <p:blipFill>
-          <a:blip r:embed="rId8"/>
+          <a:blip r:embed="rId6"/>
           <a:stretch>
             <a:fillRect/>
           </a:stretch>
@@ -4604,7 +4604,7 @@
             <a:r>
               <a:rPr sz="1100" b="0" i="1">
                 <a:solidFill>
-                  <a:srgbClr val="64748B"/>
+                  <a:srgbClr val="4D4D4D"/>
                 </a:solidFill>
                 <a:latin typeface="Helvetica Neue"/>
               </a:rPr>
@@ -4615,14 +4615,14 @@
       </p:sp>
       <p:pic>
         <p:nvPicPr>
-          <p:cNvPr id="44" name="Picture 43" descr="hand-stop--d97706.256.png"/>
+          <p:cNvPr id="44" name="Picture 43" descr="hand-stop--a96500.256.png"/>
           <p:cNvPicPr>
             <a:picLocks noChangeAspect="1"/>
           </p:cNvPicPr>
           <p:nvPr/>
         </p:nvPicPr>
         <p:blipFill>
-          <a:blip r:embed="rId9"/>
+          <a:blip r:embed="rId7"/>
           <a:stretch>
             <a:fillRect/>
           </a:stretch>
@@ -4663,7 +4663,7 @@
             <a:r>
               <a:rPr sz="1250" b="0" i="0">
                 <a:solidFill>
-                  <a:srgbClr val="D97706"/>
+                  <a:srgbClr val="A96500"/>
                 </a:solidFill>
                 <a:latin typeface="Helvetica Neue"/>
               </a:rPr>
@@ -4693,7 +4693,7 @@
           </a:solidFill>
           <a:ln w="12700">
             <a:solidFill>
-              <a:srgbClr val="E2E8F0"/>
+              <a:srgbClr val="F0F0F0"/>
             </a:solidFill>
           </a:ln>
           <a:effectLst/>
@@ -4720,14 +4720,14 @@
       </p:sp>
       <p:pic>
         <p:nvPicPr>
-          <p:cNvPr id="47" name="Picture 46" descr="users--64748b.256.png"/>
+          <p:cNvPr id="47" name="Picture 46" descr="users--4d4d4d.256.png"/>
           <p:cNvPicPr>
             <a:picLocks noChangeAspect="1"/>
           </p:cNvPicPr>
           <p:nvPr/>
         </p:nvPicPr>
         <p:blipFill>
-          <a:blip r:embed="rId10"/>
+          <a:blip r:embed="rId8"/>
           <a:stretch>
             <a:fillRect/>
           </a:stretch>
@@ -4768,7 +4768,7 @@
             <a:r>
               <a:rPr sz="1250" b="0" i="0">
                 <a:solidFill>
-                  <a:srgbClr val="1F2937"/>
+                  <a:srgbClr val="171717"/>
                 </a:solidFill>
                 <a:latin typeface="Helvetica Neue"/>
               </a:rPr>
@@ -4803,7 +4803,7 @@
             <a:r>
               <a:rPr sz="1150" b="0" i="0">
                 <a:solidFill>
-                  <a:srgbClr val="64748B"/>
+                  <a:srgbClr val="4D4D4D"/>
                 </a:solidFill>
                 <a:latin typeface="Helvetica Neue"/>
               </a:rPr>
@@ -4838,7 +4838,7 @@
             <a:r>
               <a:rPr sz="1200" b="1" i="0">
                 <a:solidFill>
-                  <a:srgbClr val="6D3FBF"/>
+                  <a:srgbClr val="171717"/>
                 </a:solidFill>
                 <a:latin typeface="Helvetica Neue"/>
               </a:rPr>
@@ -4873,7 +4873,7 @@
             <a:r>
               <a:rPr sz="1200" b="1" i="0">
                 <a:solidFill>
-                  <a:srgbClr val="6D3FBF"/>
+                  <a:srgbClr val="171717"/>
                 </a:solidFill>
                 <a:latin typeface="Helvetica Neue"/>
               </a:rPr>
@@ -4908,7 +4908,7 @@
             <a:r>
               <a:rPr sz="1200" b="1" i="0">
                 <a:solidFill>
-                  <a:srgbClr val="6D3FBF"/>
+                  <a:srgbClr val="171717"/>
                 </a:solidFill>
                 <a:latin typeface="Helvetica Neue"/>
               </a:rPr>

--- a/research/paper-arxiv/images/demo_walkthrough.pptx
+++ b/research/paper-arxiv/images/demo_walkthrough.pptx
@@ -3162,7 +3162,7 @@
                 <a:solidFill>
                   <a:srgbClr val="171717"/>
                 </a:solidFill>
-                <a:latin typeface="Helvetica Neue"/>
+                <a:latin typeface="Geist"/>
               </a:rPr>
               <a:t>S1  benign call</a:t>
             </a:r>
@@ -3267,7 +3267,7 @@
                 <a:solidFill>
                   <a:srgbClr val="171717"/>
                 </a:solidFill>
-                <a:latin typeface="Helvetica Neue"/>
+                <a:latin typeface="Geist"/>
               </a:rPr>
               <a:t>“summarise the feedback in the reviews table”</a:t>
             </a:r>
@@ -3348,7 +3348,7 @@
                 <a:solidFill>
                   <a:srgbClr val="171717"/>
                 </a:solidFill>
-                <a:latin typeface="Helvetica Neue"/>
+                <a:latin typeface="Geist"/>
               </a:rPr>
               <a:t>S2  interception</a:t>
             </a:r>
@@ -3453,7 +3453,7 @@
                 <a:solidFill>
                   <a:srgbClr val="171717"/>
                 </a:solidFill>
-                <a:latin typeface="Helvetica Neue"/>
+                <a:latin typeface="Geist"/>
               </a:rPr>
               <a:t>attendee submits input carrying a SQL injection</a:t>
             </a:r>
@@ -3534,7 +3534,7 @@
                 <a:solidFill>
                   <a:srgbClr val="171717"/>
                 </a:solidFill>
-                <a:latin typeface="Helvetica Neue"/>
+                <a:latin typeface="Geist"/>
               </a:rPr>
               <a:t>S3  human approval</a:t>
             </a:r>
@@ -3639,7 +3639,7 @@
                 <a:solidFill>
                   <a:srgbClr val="171717"/>
                 </a:solidFill>
-                <a:latin typeface="Helvetica Neue"/>
+                <a:latin typeface="Geist"/>
               </a:rPr>
               <a:t>attendee asks for kubectl delete pod</a:t>
             </a:r>
@@ -3720,7 +3720,7 @@
                 <a:solidFill>
                   <a:srgbClr val="4D4D4D"/>
                 </a:solidFill>
-                <a:latin typeface="Menlo"/>
+                <a:latin typeface="Geist Mono"/>
               </a:rPr>
               <a:t>query_database(sql="SELECT …")</a:t>
             </a:r>
@@ -3779,7 +3779,7 @@
                 <a:solidFill>
                   <a:srgbClr val="0E8A5F"/>
                 </a:solidFill>
-                <a:latin typeface="Helvetica Neue"/>
+                <a:latin typeface="Geist"/>
               </a:rPr>
               <a:t>allow</a:t>
             </a:r>
@@ -3860,7 +3860,7 @@
                 <a:solidFill>
                   <a:srgbClr val="0E8A5F"/>
                 </a:solidFill>
-                <a:latin typeface="Helvetica Neue"/>
+                <a:latin typeface="Geist"/>
               </a:rPr>
               <a:t>~1 ms</a:t>
             </a:r>
@@ -3895,7 +3895,7 @@
                 <a:solidFill>
                   <a:srgbClr val="4D4D4D"/>
                 </a:solidFill>
-                <a:latin typeface="Helvetica Neue"/>
+                <a:latin typeface="Geist"/>
               </a:rPr>
               <a:t>decision latency</a:t>
             </a:r>
@@ -3930,7 +3930,7 @@
                 <a:solidFill>
                   <a:srgbClr val="4D4D4D"/>
                 </a:solidFill>
-                <a:latin typeface="Helvetica Neue"/>
+                <a:latin typeface="Geist"/>
               </a:rPr>
               <a:t>the turn completes at its normal speed</a:t>
             </a:r>
@@ -3965,7 +3965,7 @@
                 <a:solidFill>
                   <a:srgbClr val="171717"/>
                 </a:solidFill>
-                <a:latin typeface="Helvetica Neue"/>
+                <a:latin typeface="Geist"/>
               </a:rPr>
               <a:t>Shown first on purpose.</a:t>
             </a:r>
@@ -4000,7 +4000,7 @@
                 <a:solidFill>
                   <a:srgbClr val="171717"/>
                 </a:solidFill>
-                <a:latin typeface="Helvetica Neue"/>
+                <a:latin typeface="Geist"/>
               </a:rPr>
               <a:t>A firewall only ever seen blocking</a:t>
             </a:r>
@@ -4035,7 +4035,7 @@
                 <a:solidFill>
                   <a:srgbClr val="171717"/>
                 </a:solidFill>
-                <a:latin typeface="Helvetica Neue"/>
+                <a:latin typeface="Geist"/>
               </a:rPr>
               <a:t>says nothing about what it costs when</a:t>
             </a:r>
@@ -4070,7 +4070,7 @@
                 <a:solidFill>
                   <a:srgbClr val="171717"/>
                 </a:solidFill>
-                <a:latin typeface="Helvetica Neue"/>
+                <a:latin typeface="Geist"/>
               </a:rPr>
               <a:t>nothing is wrong — which is the standard</a:t>
             </a:r>
@@ -4105,7 +4105,7 @@
                 <a:solidFill>
                   <a:srgbClr val="171717"/>
                 </a:solidFill>
-                <a:latin typeface="Helvetica Neue"/>
+                <a:latin typeface="Geist"/>
               </a:rPr>
               <a:t>objection to sitting in the hot path.</a:t>
             </a:r>
@@ -4186,7 +4186,7 @@
                 <a:solidFill>
                   <a:srgbClr val="4D4D4D"/>
                 </a:solidFill>
-                <a:latin typeface="Menlo"/>
+                <a:latin typeface="Geist Mono"/>
               </a:rPr>
               <a:t>sql="…; DROP TABLE audit_log; --"</a:t>
             </a:r>
@@ -4291,7 +4291,7 @@
                 <a:solidFill>
                   <a:srgbClr val="4D4D4D"/>
                 </a:solidFill>
-                <a:latin typeface="Helvetica Neue"/>
+                <a:latin typeface="Geist"/>
               </a:rPr>
               <a:t>the agent's own conversation, unretouched</a:t>
             </a:r>
@@ -4350,7 +4350,7 @@
                 <a:solidFill>
                   <a:srgbClr val="D40000"/>
                 </a:solidFill>
-                <a:latin typeface="Helvetica Neue"/>
+                <a:latin typeface="Geist"/>
               </a:rPr>
               <a:t>block at L1, 6.2 ms</a:t>
             </a:r>
@@ -4385,7 +4385,7 @@
                 <a:solidFill>
                   <a:srgbClr val="171717"/>
                 </a:solidFill>
-                <a:latin typeface="Helvetica Neue"/>
+                <a:latin typeface="Geist"/>
               </a:rPr>
               <a:t>The refusal returns in-band, so the agent</a:t>
             </a:r>
@@ -4420,7 +4420,7 @@
                 <a:solidFill>
                   <a:srgbClr val="171717"/>
                 </a:solidFill>
-                <a:latin typeface="Helvetica Neue"/>
+                <a:latin typeface="Geist"/>
               </a:rPr>
               <a:t>explains it and offers an alternative.</a:t>
             </a:r>
@@ -4501,7 +4501,7 @@
                 <a:solidFill>
                   <a:srgbClr val="4D4D4D"/>
                 </a:solidFill>
-                <a:latin typeface="Menlo"/>
+                <a:latin typeface="Geist Mono"/>
               </a:rPr>
               <a:t>policy: require_approval</a:t>
             </a:r>
@@ -4606,7 +4606,7 @@
                 <a:solidFill>
                   <a:srgbClr val="4D4D4D"/>
                 </a:solidFill>
-                <a:latin typeface="Helvetica Neue"/>
+                <a:latin typeface="Geist"/>
               </a:rPr>
               <a:t>the held call — a second person presses one</a:t>
             </a:r>
@@ -4665,7 +4665,7 @@
                 <a:solidFill>
                   <a:srgbClr val="A96500"/>
                 </a:solidFill>
-                <a:latin typeface="Helvetica Neue"/>
+                <a:latin typeface="Geist"/>
               </a:rPr>
               <a:t>pending — the agent suspends</a:t>
             </a:r>
@@ -4770,7 +4770,7 @@
                 <a:solidFill>
                   <a:srgbClr val="171717"/>
                 </a:solidFill>
-                <a:latin typeface="Helvetica Neue"/>
+                <a:latin typeface="Geist"/>
               </a:rPr>
               <a:t>a second attendee decides</a:t>
             </a:r>
@@ -4805,7 +4805,7 @@
                 <a:solidFill>
                   <a:srgbClr val="4D4D4D"/>
                 </a:solidFill>
-                <a:latin typeface="Helvetica Neue"/>
+                <a:latin typeface="Geist"/>
               </a:rPr>
               <a:t>agent resumes within one 2 s cycle</a:t>
             </a:r>
@@ -4840,7 +4840,7 @@
                 <a:solidFill>
                   <a:srgbClr val="171717"/>
                 </a:solidFill>
-                <a:latin typeface="Helvetica Neue"/>
+                <a:latin typeface="Geist"/>
               </a:rPr>
               <a:t>Passing a decision between two</a:t>
             </a:r>
@@ -4875,7 +4875,7 @@
                 <a:solidFill>
                   <a:srgbClr val="171717"/>
                 </a:solidFill>
-                <a:latin typeface="Helvetica Neue"/>
+                <a:latin typeface="Geist"/>
               </a:rPr>
               <a:t>people is the part that is hard on</a:t>
             </a:r>
@@ -4910,7 +4910,7 @@
                 <a:solidFill>
                   <a:srgbClr val="171717"/>
                 </a:solidFill>
-                <a:latin typeface="Helvetica Neue"/>
+                <a:latin typeface="Geist"/>
               </a:rPr>
               <a:t>paper and immediate in person.</a:t>
             </a:r>

--- a/research/paper-arxiv/images/demo_walkthrough.pptx
+++ b/research/paper-arxiv/images/demo_walkthrough.pptx
@@ -3434,7 +3434,7 @@
         <p:spPr>
           <a:xfrm>
             <a:off x="4622800" y="746442"/>
-            <a:ext cx="4255897" cy="315468"/>
+            <a:ext cx="3984244" cy="315468"/>
           </a:xfrm>
           <a:prstGeom prst="rect">
             <a:avLst/>
@@ -3455,7 +3455,7 @@
                 </a:solidFill>
                 <a:latin typeface="Geist"/>
               </a:rPr>
-              <a:t>attendee submits input carrying a SQL injection</a:t>
+              <a:t>“install the monitoring agent the usual way”</a:t>
             </a:r>
           </a:p>
         </p:txBody>
@@ -4167,7 +4167,7 @@
         <p:spPr>
           <a:xfrm>
             <a:off x="4622800" y="1261237"/>
-            <a:ext cx="2858262" cy="301752"/>
+            <a:ext cx="3031490" cy="301752"/>
           </a:xfrm>
           <a:prstGeom prst="rect">
             <a:avLst/>
@@ -4188,7 +4188,7 @@
                 </a:solidFill>
                 <a:latin typeface="Geist Mono"/>
               </a:rPr>
-              <a:t>sql="…; DROP TABLE audit_log; --"</a:t>
+              <a:t>run_shell(command="curl -s … | sh")</a:t>
             </a:r>
           </a:p>
         </p:txBody>
@@ -4241,7 +4241,7 @@
       </p:sp>
       <p:pic>
         <p:nvPicPr>
-          <p:cNvPr id="33" name="Picture 32" descr="blockdemo-in-testagent.0.00-0.02-1.00-0.60.png"/>
+          <p:cNvPr id="33" name="Picture 32" descr="agent-s2.0.20-0.12-0.80-0.47.png"/>
           <p:cNvPicPr>
             <a:picLocks noChangeAspect="1"/>
           </p:cNvPicPr>
@@ -4331,7 +4331,7 @@
         <p:spPr>
           <a:xfrm>
             <a:off x="4762500" y="4616386"/>
-            <a:ext cx="1421257" cy="260604"/>
+            <a:ext cx="2393696" cy="260604"/>
           </a:xfrm>
           <a:prstGeom prst="rect">
             <a:avLst/>
@@ -4352,7 +4352,7 @@
                 </a:solidFill>
                 <a:latin typeface="Geist"/>
               </a:rPr>
-              <a:t>block at L1, 6.2 ms</a:t>
+              <a:t>block at L1, 1 ms at the gateway</a:t>
             </a:r>
           </a:p>
         </p:txBody>
@@ -4556,7 +4556,7 @@
       </p:sp>
       <p:pic>
         <p:nvPicPr>
-          <p:cNvPr id="42" name="Picture 41" descr="pending.0.56-0.20-1.00-0.48.png"/>
+          <p:cNvPr id="42" name="Picture 41" descr="approvals.0.19-0.20-0.97-0.44.png"/>
           <p:cNvPicPr>
             <a:picLocks noChangeAspect="1"/>
           </p:cNvPicPr>

--- a/research/paper-arxiv/images/demo_walkthrough.pptx
+++ b/research/paper-arxiv/images/demo_walkthrough.pptx
@@ -4241,7 +4241,7 @@
       </p:sp>
       <p:pic>
         <p:nvPicPr>
-          <p:cNvPr id="33" name="Picture 32" descr="agent-s2.0.20-0.12-0.80-0.47.png"/>
+          <p:cNvPr id="33" name="Picture 32" descr="agent-S2.0.20-0.12-0.80-0.47.png"/>
           <p:cNvPicPr>
             <a:picLocks noChangeAspect="1"/>
           </p:cNvPicPr>
@@ -4556,7 +4556,7 @@
       </p:sp>
       <p:pic>
         <p:nvPicPr>
-          <p:cNvPr id="42" name="Picture 41" descr="approvals.0.19-0.20-0.97-0.44.png"/>
+          <p:cNvPr id="42" name="Picture 41" descr="approvals-s3.0.19-0.23-0.66-0.35.png"/>
           <p:cNvPicPr>
             <a:picLocks noChangeAspect="1"/>
           </p:cNvPicPr>
@@ -4571,51 +4571,16 @@
         <p:spPr>
           <a:xfrm>
             <a:off x="8775700" y="1689100"/>
-            <a:ext cx="3683000" cy="1219200"/>
+            <a:ext cx="3683000" cy="736600"/>
           </a:xfrm>
           <a:prstGeom prst="rect">
             <a:avLst/>
           </a:prstGeom>
         </p:spPr>
       </p:pic>
-      <p:sp>
-        <p:nvSpPr>
-          <p:cNvPr id="43" name="TextBox 42"/>
-          <p:cNvSpPr txBox="1"/>
-          <p:nvPr/>
-        </p:nvSpPr>
-        <p:spPr>
-          <a:xfrm>
-            <a:off x="8763000" y="2963545"/>
-            <a:ext cx="3724402" cy="301752"/>
-          </a:xfrm>
-          <a:prstGeom prst="rect">
-            <a:avLst/>
-          </a:prstGeom>
-          <a:noFill/>
-        </p:spPr>
-        <p:txBody>
-          <a:bodyPr wrap="none" lIns="0" rIns="0" tIns="0" bIns="0" anchor="t">
-            <a:spAutoFit/>
-          </a:bodyPr>
-          <a:lstStyle/>
-          <a:p>
-            <a:pPr algn="l"/>
-            <a:r>
-              <a:rPr sz="1100" b="0" i="1">
-                <a:solidFill>
-                  <a:srgbClr val="4D4D4D"/>
-                </a:solidFill>
-                <a:latin typeface="Geist"/>
-              </a:rPr>
-              <a:t>the held call — a second person presses one</a:t>
-            </a:r>
-          </a:p>
-        </p:txBody>
-      </p:sp>
       <p:pic>
         <p:nvPicPr>
-          <p:cNvPr id="44" name="Picture 43" descr="hand-stop--a96500.256.png"/>
+          <p:cNvPr id="43" name="Picture 42" descr="approvals-s3.0.78-0.52-0.95-0.58.png"/>
           <p:cNvPicPr>
             <a:picLocks noChangeAspect="1"/>
           </p:cNvPicPr>
@@ -4629,6 +4594,65 @@
         </p:blipFill>
         <p:spPr>
           <a:xfrm>
+            <a:off x="10553700" y="2489200"/>
+            <a:ext cx="1905000" cy="393700"/>
+          </a:xfrm>
+          <a:prstGeom prst="rect">
+            <a:avLst/>
+          </a:prstGeom>
+        </p:spPr>
+      </p:pic>
+      <p:sp>
+        <p:nvSpPr>
+          <p:cNvPr id="44" name="TextBox 43"/>
+          <p:cNvSpPr txBox="1"/>
+          <p:nvPr/>
+        </p:nvSpPr>
+        <p:spPr>
+          <a:xfrm>
+            <a:off x="8763000" y="2963545"/>
+            <a:ext cx="3724402" cy="301752"/>
+          </a:xfrm>
+          <a:prstGeom prst="rect">
+            <a:avLst/>
+          </a:prstGeom>
+          <a:noFill/>
+        </p:spPr>
+        <p:txBody>
+          <a:bodyPr wrap="none" lIns="0" rIns="0" tIns="0" bIns="0" anchor="t">
+            <a:spAutoFit/>
+          </a:bodyPr>
+          <a:lstStyle/>
+          <a:p>
+            <a:pPr algn="l"/>
+            <a:r>
+              <a:rPr sz="1100" b="0" i="1">
+                <a:solidFill>
+                  <a:srgbClr val="4D4D4D"/>
+                </a:solidFill>
+                <a:latin typeface="Geist"/>
+              </a:rPr>
+              <a:t>the held call — a second person presses one</a:t>
+            </a:r>
+          </a:p>
+        </p:txBody>
+      </p:sp>
+      <p:pic>
+        <p:nvPicPr>
+          <p:cNvPr id="45" name="Picture 44" descr="hand-stop--a96500.256.png"/>
+          <p:cNvPicPr>
+            <a:picLocks noChangeAspect="1"/>
+          </p:cNvPicPr>
+          <p:nvPr/>
+        </p:nvPicPr>
+        <p:blipFill>
+          <a:blip r:embed="rId8"/>
+          <a:stretch>
+            <a:fillRect/>
+          </a:stretch>
+        </p:blipFill>
+        <p:spPr>
+          <a:xfrm>
             <a:off x="8763000" y="3276600"/>
             <a:ext cx="190500" cy="190500"/>
           </a:xfrm>
@@ -4639,7 +4663,7 @@
       </p:pic>
       <p:sp>
         <p:nvSpPr>
-          <p:cNvPr id="45" name="TextBox 44"/>
+          <p:cNvPr id="46" name="TextBox 45"/>
           <p:cNvSpPr txBox="1"/>
           <p:nvPr/>
         </p:nvSpPr>
@@ -4674,7 +4698,7 @@
       </p:sp>
       <p:sp>
         <p:nvSpPr>
-          <p:cNvPr id="46" name="Rounded Rectangle 45"/>
+          <p:cNvPr id="47" name="Rounded Rectangle 46"/>
           <p:cNvSpPr/>
           <p:nvPr/>
         </p:nvSpPr>
@@ -4720,14 +4744,14 @@
       </p:sp>
       <p:pic>
         <p:nvPicPr>
-          <p:cNvPr id="47" name="Picture 46" descr="users--4d4d4d.256.png"/>
+          <p:cNvPr id="48" name="Picture 47" descr="users--4d4d4d.256.png"/>
           <p:cNvPicPr>
             <a:picLocks noChangeAspect="1"/>
           </p:cNvPicPr>
           <p:nvPr/>
         </p:nvPicPr>
         <p:blipFill>
-          <a:blip r:embed="rId8"/>
+          <a:blip r:embed="rId9"/>
           <a:stretch>
             <a:fillRect/>
           </a:stretch>
@@ -4744,7 +4768,7 @@
       </p:pic>
       <p:sp>
         <p:nvSpPr>
-          <p:cNvPr id="48" name="TextBox 47"/>
+          <p:cNvPr id="49" name="TextBox 48"/>
           <p:cNvSpPr txBox="1"/>
           <p:nvPr/>
         </p:nvSpPr>
@@ -4779,7 +4803,7 @@
       </p:sp>
       <p:sp>
         <p:nvSpPr>
-          <p:cNvPr id="49" name="TextBox 48"/>
+          <p:cNvPr id="50" name="TextBox 49"/>
           <p:cNvSpPr txBox="1"/>
           <p:nvPr/>
         </p:nvSpPr>
@@ -4814,7 +4838,7 @@
       </p:sp>
       <p:sp>
         <p:nvSpPr>
-          <p:cNvPr id="50" name="TextBox 49"/>
+          <p:cNvPr id="51" name="TextBox 50"/>
           <p:cNvSpPr txBox="1"/>
           <p:nvPr/>
         </p:nvSpPr>
@@ -4849,7 +4873,7 @@
       </p:sp>
       <p:sp>
         <p:nvSpPr>
-          <p:cNvPr id="51" name="TextBox 50"/>
+          <p:cNvPr id="52" name="TextBox 51"/>
           <p:cNvSpPr txBox="1"/>
           <p:nvPr/>
         </p:nvSpPr>
@@ -4884,7 +4908,7 @@
       </p:sp>
       <p:sp>
         <p:nvSpPr>
-          <p:cNvPr id="52" name="TextBox 51"/>
+          <p:cNvPr id="53" name="TextBox 52"/>
           <p:cNvSpPr txBox="1"/>
           <p:nvPr/>
         </p:nvSpPr>

--- a/research/paper-arxiv/images/demo_walkthrough.pptx
+++ b/research/paper-arxiv/images/demo_walkthrough.pptx
@@ -3840,8 +3840,8 @@
         </p:nvSpPr>
         <p:spPr>
           <a:xfrm>
-            <a:off x="1672590" y="2236470"/>
-            <a:ext cx="1023620" cy="713232"/>
+            <a:off x="1774952" y="2236470"/>
+            <a:ext cx="818896" cy="713232"/>
           </a:xfrm>
           <a:prstGeom prst="rect">
             <a:avLst/>
@@ -3862,7 +3862,7 @@
                 </a:solidFill>
                 <a:latin typeface="Geist"/>
               </a:rPr>
-              <a:t>~1 ms</a:t>
+              <a:t>2 ms</a:t>
             </a:r>
           </a:p>
         </p:txBody>
@@ -3875,8 +3875,8 @@
         </p:nvSpPr>
         <p:spPr>
           <a:xfrm>
-            <a:off x="1428496" y="2694940"/>
-            <a:ext cx="1511808" cy="329184"/>
+            <a:off x="1192276" y="2694940"/>
+            <a:ext cx="1984248" cy="329184"/>
           </a:xfrm>
           <a:prstGeom prst="rect">
             <a:avLst/>
@@ -3897,7 +3897,7 @@
                 </a:solidFill>
                 <a:latin typeface="Geist"/>
               </a:rPr>
-              <a:t>decision latency</a:t>
+              <a:t>gateway decision time</a:t>
             </a:r>
           </a:p>
         </p:txBody>
@@ -4352,7 +4352,7 @@
                 </a:solidFill>
                 <a:latin typeface="Geist"/>
               </a:rPr>
-              <a:t>block at L1, 1 ms at the gateway</a:t>
+              <a:t>block at L1, 2 ms at the gateway</a:t>
             </a:r>
           </a:p>
         </p:txBody>
